--- a/Universal Dialog Editor/UDSAssetStore.pptx
+++ b/Universal Dialog Editor/UDSAssetStore.pptx
@@ -8,11 +8,12 @@
     <p:sldId id="256" r:id="rId2"/>
     <p:sldId id="263" r:id="rId3"/>
     <p:sldId id="257" r:id="rId4"/>
-    <p:sldId id="258" r:id="rId5"/>
-    <p:sldId id="259" r:id="rId6"/>
-    <p:sldId id="260" r:id="rId7"/>
-    <p:sldId id="261" r:id="rId8"/>
-    <p:sldId id="262" r:id="rId9"/>
+    <p:sldId id="264" r:id="rId5"/>
+    <p:sldId id="265" r:id="rId6"/>
+    <p:sldId id="258" r:id="rId7"/>
+    <p:sldId id="259" r:id="rId8"/>
+    <p:sldId id="261" r:id="rId9"/>
+    <p:sldId id="262" r:id="rId10"/>
   </p:sldIdLst>
   <p:sldSz cx="12192000" cy="6858000"/>
   <p:notesSz cx="6858000" cy="9144000"/>
@@ -266,7 +267,7 @@
           <a:p>
             <a:fld id="{3D460BA6-D0F2-44C6-BF35-A58F33BD9D6A}" type="datetimeFigureOut">
               <a:rPr lang="de-DE" smtClean="0"/>
-              <a:t>31.08.2021</a:t>
+              <a:t>01.09.2021</a:t>
             </a:fld>
             <a:endParaRPr lang="de-DE"/>
           </a:p>
@@ -464,7 +465,7 @@
           <a:p>
             <a:fld id="{3D460BA6-D0F2-44C6-BF35-A58F33BD9D6A}" type="datetimeFigureOut">
               <a:rPr lang="de-DE" smtClean="0"/>
-              <a:t>31.08.2021</a:t>
+              <a:t>01.09.2021</a:t>
             </a:fld>
             <a:endParaRPr lang="de-DE"/>
           </a:p>
@@ -672,7 +673,7 @@
           <a:p>
             <a:fld id="{3D460BA6-D0F2-44C6-BF35-A58F33BD9D6A}" type="datetimeFigureOut">
               <a:rPr lang="de-DE" smtClean="0"/>
-              <a:t>31.08.2021</a:t>
+              <a:t>01.09.2021</a:t>
             </a:fld>
             <a:endParaRPr lang="de-DE"/>
           </a:p>
@@ -870,7 +871,7 @@
           <a:p>
             <a:fld id="{3D460BA6-D0F2-44C6-BF35-A58F33BD9D6A}" type="datetimeFigureOut">
               <a:rPr lang="de-DE" smtClean="0"/>
-              <a:t>31.08.2021</a:t>
+              <a:t>01.09.2021</a:t>
             </a:fld>
             <a:endParaRPr lang="de-DE"/>
           </a:p>
@@ -1145,7 +1146,7 @@
           <a:p>
             <a:fld id="{3D460BA6-D0F2-44C6-BF35-A58F33BD9D6A}" type="datetimeFigureOut">
               <a:rPr lang="de-DE" smtClean="0"/>
-              <a:t>31.08.2021</a:t>
+              <a:t>01.09.2021</a:t>
             </a:fld>
             <a:endParaRPr lang="de-DE"/>
           </a:p>
@@ -1410,7 +1411,7 @@
           <a:p>
             <a:fld id="{3D460BA6-D0F2-44C6-BF35-A58F33BD9D6A}" type="datetimeFigureOut">
               <a:rPr lang="de-DE" smtClean="0"/>
-              <a:t>31.08.2021</a:t>
+              <a:t>01.09.2021</a:t>
             </a:fld>
             <a:endParaRPr lang="de-DE"/>
           </a:p>
@@ -1822,7 +1823,7 @@
           <a:p>
             <a:fld id="{3D460BA6-D0F2-44C6-BF35-A58F33BD9D6A}" type="datetimeFigureOut">
               <a:rPr lang="de-DE" smtClean="0"/>
-              <a:t>31.08.2021</a:t>
+              <a:t>01.09.2021</a:t>
             </a:fld>
             <a:endParaRPr lang="de-DE"/>
           </a:p>
@@ -1963,7 +1964,7 @@
           <a:p>
             <a:fld id="{3D460BA6-D0F2-44C6-BF35-A58F33BD9D6A}" type="datetimeFigureOut">
               <a:rPr lang="de-DE" smtClean="0"/>
-              <a:t>31.08.2021</a:t>
+              <a:t>01.09.2021</a:t>
             </a:fld>
             <a:endParaRPr lang="de-DE"/>
           </a:p>
@@ -2076,7 +2077,7 @@
           <a:p>
             <a:fld id="{3D460BA6-D0F2-44C6-BF35-A58F33BD9D6A}" type="datetimeFigureOut">
               <a:rPr lang="de-DE" smtClean="0"/>
-              <a:t>31.08.2021</a:t>
+              <a:t>01.09.2021</a:t>
             </a:fld>
             <a:endParaRPr lang="de-DE"/>
           </a:p>
@@ -2387,7 +2388,7 @@
           <a:p>
             <a:fld id="{3D460BA6-D0F2-44C6-BF35-A58F33BD9D6A}" type="datetimeFigureOut">
               <a:rPr lang="de-DE" smtClean="0"/>
-              <a:t>31.08.2021</a:t>
+              <a:t>01.09.2021</a:t>
             </a:fld>
             <a:endParaRPr lang="de-DE"/>
           </a:p>
@@ -2675,7 +2676,7 @@
           <a:p>
             <a:fld id="{3D460BA6-D0F2-44C6-BF35-A58F33BD9D6A}" type="datetimeFigureOut">
               <a:rPr lang="de-DE" smtClean="0"/>
-              <a:t>31.08.2021</a:t>
+              <a:t>01.09.2021</a:t>
             </a:fld>
             <a:endParaRPr lang="de-DE"/>
           </a:p>
@@ -2916,7 +2917,7 @@
           <a:p>
             <a:fld id="{3D460BA6-D0F2-44C6-BF35-A58F33BD9D6A}" type="datetimeFigureOut">
               <a:rPr lang="de-DE" smtClean="0"/>
-              <a:t>31.08.2021</a:t>
+              <a:t>01.09.2021</a:t>
             </a:fld>
             <a:endParaRPr lang="de-DE"/>
           </a:p>
@@ -3662,14 +3663,13 @@
               </a:ext>
             </a:extLst>
           </a:blip>
-          <a:stretch>
-            <a:fillRect/>
-          </a:stretch>
+          <a:srcRect/>
+          <a:stretch/>
         </p:blipFill>
         <p:spPr>
           <a:xfrm>
-            <a:off x="457200" y="496825"/>
-            <a:ext cx="11277600" cy="5864350"/>
+            <a:off x="457200" y="497999"/>
+            <a:ext cx="11277600" cy="5862002"/>
           </a:xfrm>
           <a:prstGeom prst="rect">
             <a:avLst/>
@@ -5874,6 +5874,1634 @@
           </a:p>
         </p:txBody>
       </p:sp>
+      <p:pic>
+        <p:nvPicPr>
+          <p:cNvPr id="3" name="Grafik 2">
+            <a:extLst>
+              <a:ext uri="{FF2B5EF4-FFF2-40B4-BE49-F238E27FC236}">
+                <a16:creationId xmlns:a16="http://schemas.microsoft.com/office/drawing/2014/main" id="{A51AED59-AC3B-4AEF-96D2-BCDEEFA5915B}"/>
+              </a:ext>
+            </a:extLst>
+          </p:cNvPr>
+          <p:cNvPicPr>
+            <a:picLocks noChangeAspect="1"/>
+          </p:cNvPicPr>
+          <p:nvPr/>
+        </p:nvPicPr>
+        <p:blipFill>
+          <a:blip r:embed="rId2">
+            <a:extLst>
+              <a:ext uri="{28A0092B-C50C-407E-A947-70E740481C1C}">
+                <a14:useLocalDpi xmlns:a14="http://schemas.microsoft.com/office/drawing/2010/main" val="0"/>
+              </a:ext>
+            </a:extLst>
+          </a:blip>
+          <a:srcRect/>
+          <a:stretch/>
+        </p:blipFill>
+        <p:spPr>
+          <a:xfrm>
+            <a:off x="1896875" y="725557"/>
+            <a:ext cx="8398249" cy="5406886"/>
+          </a:xfrm>
+          <a:prstGeom prst="rect">
+            <a:avLst/>
+          </a:prstGeom>
+        </p:spPr>
+      </p:pic>
+      <p:grpSp>
+        <p:nvGrpSpPr>
+          <p:cNvPr id="7" name="Gruppieren 6">
+            <a:extLst>
+              <a:ext uri="{FF2B5EF4-FFF2-40B4-BE49-F238E27FC236}">
+                <a16:creationId xmlns:a16="http://schemas.microsoft.com/office/drawing/2014/main" id="{5DEB3A40-6BDF-48C2-B270-590F3402DB75}"/>
+              </a:ext>
+            </a:extLst>
+          </p:cNvPr>
+          <p:cNvGrpSpPr/>
+          <p:nvPr/>
+        </p:nvGrpSpPr>
+        <p:grpSpPr>
+          <a:xfrm>
+            <a:off x="7431417" y="5359081"/>
+            <a:ext cx="4766735" cy="999066"/>
+            <a:chOff x="7425265" y="964584"/>
+            <a:chExt cx="4766735" cy="999066"/>
+          </a:xfrm>
+        </p:grpSpPr>
+        <p:sp>
+          <p:nvSpPr>
+            <p:cNvPr id="9" name="Rechteck: eine Ecke abgeschnitten 8">
+              <a:extLst>
+                <a:ext uri="{FF2B5EF4-FFF2-40B4-BE49-F238E27FC236}">
+                  <a16:creationId xmlns:a16="http://schemas.microsoft.com/office/drawing/2014/main" id="{22AB770B-D05A-46AB-8561-5ACAFE0FAB9D}"/>
+                </a:ext>
+              </a:extLst>
+            </p:cNvPr>
+            <p:cNvSpPr/>
+            <p:nvPr/>
+          </p:nvSpPr>
+          <p:spPr>
+            <a:xfrm flipH="1">
+              <a:off x="7425265" y="964584"/>
+              <a:ext cx="4766735" cy="999066"/>
+            </a:xfrm>
+            <a:prstGeom prst="snip1Rect">
+              <a:avLst>
+                <a:gd name="adj" fmla="val 50000"/>
+              </a:avLst>
+            </a:prstGeom>
+            <a:gradFill flip="none" rotWithShape="1">
+              <a:gsLst>
+                <a:gs pos="0">
+                  <a:srgbClr val="335797">
+                    <a:shade val="30000"/>
+                    <a:satMod val="115000"/>
+                  </a:srgbClr>
+                </a:gs>
+                <a:gs pos="50000">
+                  <a:srgbClr val="335797">
+                    <a:shade val="67500"/>
+                    <a:satMod val="115000"/>
+                  </a:srgbClr>
+                </a:gs>
+                <a:gs pos="100000">
+                  <a:srgbClr val="335797">
+                    <a:shade val="100000"/>
+                    <a:satMod val="115000"/>
+                  </a:srgbClr>
+                </a:gs>
+              </a:gsLst>
+              <a:path path="circle">
+                <a:fillToRect l="100000" t="100000"/>
+              </a:path>
+              <a:tileRect r="-100000" b="-100000"/>
+            </a:gradFill>
+            <a:ln w="19050">
+              <a:solidFill>
+                <a:schemeClr val="bg1"/>
+              </a:solidFill>
+            </a:ln>
+          </p:spPr>
+          <p:style>
+            <a:lnRef idx="2">
+              <a:schemeClr val="accent1">
+                <a:shade val="50000"/>
+              </a:schemeClr>
+            </a:lnRef>
+            <a:fillRef idx="1">
+              <a:schemeClr val="accent1"/>
+            </a:fillRef>
+            <a:effectRef idx="0">
+              <a:schemeClr val="accent1"/>
+            </a:effectRef>
+            <a:fontRef idx="minor">
+              <a:schemeClr val="lt1"/>
+            </a:fontRef>
+          </p:style>
+          <p:txBody>
+            <a:bodyPr rtlCol="0" anchor="ctr"/>
+            <a:lstStyle/>
+            <a:p>
+              <a:pPr algn="ctr"/>
+              <a:endParaRPr lang="de-DE" dirty="0"/>
+            </a:p>
+          </p:txBody>
+        </p:sp>
+        <p:sp>
+          <p:nvSpPr>
+            <p:cNvPr id="12" name="Textfeld 11">
+              <a:extLst>
+                <a:ext uri="{FF2B5EF4-FFF2-40B4-BE49-F238E27FC236}">
+                  <a16:creationId xmlns:a16="http://schemas.microsoft.com/office/drawing/2014/main" id="{2EC181D6-53AB-491F-8D53-469A91CA71E7}"/>
+                </a:ext>
+              </a:extLst>
+            </p:cNvPr>
+            <p:cNvSpPr txBox="1"/>
+            <p:nvPr/>
+          </p:nvSpPr>
+          <p:spPr>
+            <a:xfrm>
+              <a:off x="8159954" y="1002452"/>
+              <a:ext cx="3903131" cy="923330"/>
+            </a:xfrm>
+            <a:prstGeom prst="rect">
+              <a:avLst/>
+            </a:prstGeom>
+            <a:noFill/>
+          </p:spPr>
+          <p:txBody>
+            <a:bodyPr wrap="square" rtlCol="0">
+              <a:spAutoFit/>
+            </a:bodyPr>
+            <a:lstStyle/>
+            <a:p>
+              <a:r>
+                <a:rPr lang="de-DE" b="1" dirty="0">
+                  <a:solidFill>
+                    <a:schemeClr val="bg1"/>
+                  </a:solidFill>
+                  <a:latin typeface="Arial" panose="020B0604020202020204" pitchFamily="34" charset="0"/>
+                  <a:cs typeface="Arial" panose="020B0604020202020204" pitchFamily="34" charset="0"/>
+                </a:rPr>
+                <a:t>Add </a:t>
+              </a:r>
+              <a:r>
+                <a:rPr lang="de-DE" b="1" dirty="0" err="1">
+                  <a:solidFill>
+                    <a:schemeClr val="bg1"/>
+                  </a:solidFill>
+                  <a:latin typeface="Arial" panose="020B0604020202020204" pitchFamily="34" charset="0"/>
+                  <a:cs typeface="Arial" panose="020B0604020202020204" pitchFamily="34" charset="0"/>
+                </a:rPr>
+                <a:t>loads</a:t>
+              </a:r>
+              <a:r>
+                <a:rPr lang="de-DE" b="1" dirty="0">
+                  <a:solidFill>
+                    <a:schemeClr val="bg1"/>
+                  </a:solidFill>
+                  <a:latin typeface="Arial" panose="020B0604020202020204" pitchFamily="34" charset="0"/>
+                  <a:cs typeface="Arial" panose="020B0604020202020204" pitchFamily="34" charset="0"/>
+                </a:rPr>
+                <a:t> </a:t>
+              </a:r>
+              <a:r>
+                <a:rPr lang="de-DE" b="1" dirty="0" err="1">
+                  <a:solidFill>
+                    <a:schemeClr val="bg1"/>
+                  </a:solidFill>
+                  <a:latin typeface="Arial" panose="020B0604020202020204" pitchFamily="34" charset="0"/>
+                  <a:cs typeface="Arial" panose="020B0604020202020204" pitchFamily="34" charset="0"/>
+                </a:rPr>
+                <a:t>of</a:t>
+              </a:r>
+              <a:r>
+                <a:rPr lang="de-DE" b="1" dirty="0">
+                  <a:solidFill>
+                    <a:schemeClr val="bg1"/>
+                  </a:solidFill>
+                  <a:latin typeface="Arial" panose="020B0604020202020204" pitchFamily="34" charset="0"/>
+                  <a:cs typeface="Arial" panose="020B0604020202020204" pitchFamily="34" charset="0"/>
+                </a:rPr>
+                <a:t> </a:t>
+              </a:r>
+              <a:r>
+                <a:rPr lang="de-DE" b="1" dirty="0" err="1">
+                  <a:solidFill>
+                    <a:schemeClr val="bg1"/>
+                  </a:solidFill>
+                  <a:latin typeface="Arial" panose="020B0604020202020204" pitchFamily="34" charset="0"/>
+                  <a:cs typeface="Arial" panose="020B0604020202020204" pitchFamily="34" charset="0"/>
+                </a:rPr>
+                <a:t>custom</a:t>
+              </a:r>
+              <a:r>
+                <a:rPr lang="de-DE" b="1" dirty="0">
+                  <a:solidFill>
+                    <a:schemeClr val="bg1"/>
+                  </a:solidFill>
+                  <a:latin typeface="Arial" panose="020B0604020202020204" pitchFamily="34" charset="0"/>
+                  <a:cs typeface="Arial" panose="020B0604020202020204" pitchFamily="34" charset="0"/>
+                </a:rPr>
+                <a:t> </a:t>
+              </a:r>
+              <a:r>
+                <a:rPr lang="de-DE" b="1" dirty="0" err="1">
+                  <a:solidFill>
+                    <a:schemeClr val="bg1"/>
+                  </a:solidFill>
+                  <a:latin typeface="Arial" panose="020B0604020202020204" pitchFamily="34" charset="0"/>
+                  <a:cs typeface="Arial" panose="020B0604020202020204" pitchFamily="34" charset="0"/>
+                </a:rPr>
+                <a:t>functionality</a:t>
+              </a:r>
+              <a:r>
+                <a:rPr lang="de-DE" b="1" dirty="0">
+                  <a:solidFill>
+                    <a:schemeClr val="bg1"/>
+                  </a:solidFill>
+                  <a:latin typeface="Arial" panose="020B0604020202020204" pitchFamily="34" charset="0"/>
+                  <a:cs typeface="Arial" panose="020B0604020202020204" pitchFamily="34" charset="0"/>
+                </a:rPr>
+                <a:t> in a </a:t>
+              </a:r>
+              <a:r>
+                <a:rPr lang="de-DE" b="1" dirty="0" err="1">
+                  <a:solidFill>
+                    <a:schemeClr val="bg1"/>
+                  </a:solidFill>
+                  <a:latin typeface="Arial" panose="020B0604020202020204" pitchFamily="34" charset="0"/>
+                  <a:cs typeface="Arial" panose="020B0604020202020204" pitchFamily="34" charset="0"/>
+                </a:rPr>
+                <a:t>way</a:t>
+              </a:r>
+              <a:r>
+                <a:rPr lang="de-DE" b="1" dirty="0">
+                  <a:solidFill>
+                    <a:schemeClr val="bg1"/>
+                  </a:solidFill>
+                  <a:latin typeface="Arial" panose="020B0604020202020204" pitchFamily="34" charset="0"/>
+                  <a:cs typeface="Arial" panose="020B0604020202020204" pitchFamily="34" charset="0"/>
+                </a:rPr>
+                <a:t> </a:t>
+              </a:r>
+              <a:r>
+                <a:rPr lang="de-DE" b="1" dirty="0" err="1">
+                  <a:solidFill>
+                    <a:schemeClr val="bg1"/>
+                  </a:solidFill>
+                  <a:latin typeface="Arial" panose="020B0604020202020204" pitchFamily="34" charset="0"/>
+                  <a:cs typeface="Arial" panose="020B0604020202020204" pitchFamily="34" charset="0"/>
+                </a:rPr>
+                <a:t>similar</a:t>
+              </a:r>
+              <a:r>
+                <a:rPr lang="de-DE" b="1" dirty="0">
+                  <a:solidFill>
+                    <a:schemeClr val="bg1"/>
+                  </a:solidFill>
+                  <a:latin typeface="Arial" panose="020B0604020202020204" pitchFamily="34" charset="0"/>
+                  <a:cs typeface="Arial" panose="020B0604020202020204" pitchFamily="34" charset="0"/>
+                </a:rPr>
+                <a:t> </a:t>
+              </a:r>
+              <a:r>
+                <a:rPr lang="de-DE" b="1" dirty="0" err="1">
+                  <a:solidFill>
+                    <a:schemeClr val="bg1"/>
+                  </a:solidFill>
+                  <a:latin typeface="Arial" panose="020B0604020202020204" pitchFamily="34" charset="0"/>
+                  <a:cs typeface="Arial" panose="020B0604020202020204" pitchFamily="34" charset="0"/>
+                </a:rPr>
+                <a:t>to</a:t>
+              </a:r>
+              <a:r>
+                <a:rPr lang="de-DE" b="1" dirty="0">
+                  <a:solidFill>
+                    <a:schemeClr val="bg1"/>
+                  </a:solidFill>
+                  <a:latin typeface="Arial" panose="020B0604020202020204" pitchFamily="34" charset="0"/>
+                  <a:cs typeface="Arial" panose="020B0604020202020204" pitchFamily="34" charset="0"/>
+                </a:rPr>
+                <a:t> </a:t>
+              </a:r>
+              <a:r>
+                <a:rPr lang="de-DE" b="1" dirty="0" err="1">
+                  <a:solidFill>
+                    <a:schemeClr val="bg1"/>
+                  </a:solidFill>
+                  <a:latin typeface="Arial" panose="020B0604020202020204" pitchFamily="34" charset="0"/>
+                  <a:cs typeface="Arial" panose="020B0604020202020204" pitchFamily="34" charset="0"/>
+                </a:rPr>
+                <a:t>how</a:t>
+              </a:r>
+              <a:r>
+                <a:rPr lang="de-DE" b="1" dirty="0">
+                  <a:solidFill>
+                    <a:schemeClr val="bg1"/>
+                  </a:solidFill>
+                  <a:latin typeface="Arial" panose="020B0604020202020204" pitchFamily="34" charset="0"/>
+                  <a:cs typeface="Arial" panose="020B0604020202020204" pitchFamily="34" charset="0"/>
+                </a:rPr>
+                <a:t> </a:t>
+              </a:r>
+              <a:r>
+                <a:rPr lang="de-DE" b="1" dirty="0" err="1">
+                  <a:solidFill>
+                    <a:schemeClr val="bg1"/>
+                  </a:solidFill>
+                  <a:latin typeface="Arial" panose="020B0604020202020204" pitchFamily="34" charset="0"/>
+                  <a:cs typeface="Arial" panose="020B0604020202020204" pitchFamily="34" charset="0"/>
+                </a:rPr>
+                <a:t>Unity‘s</a:t>
+              </a:r>
+              <a:r>
+                <a:rPr lang="de-DE" b="1" dirty="0">
+                  <a:solidFill>
+                    <a:schemeClr val="bg1"/>
+                  </a:solidFill>
+                  <a:latin typeface="Arial" panose="020B0604020202020204" pitchFamily="34" charset="0"/>
+                  <a:cs typeface="Arial" panose="020B0604020202020204" pitchFamily="34" charset="0"/>
+                </a:rPr>
+                <a:t> </a:t>
+              </a:r>
+              <a:r>
+                <a:rPr lang="de-DE" b="1" dirty="0" err="1">
+                  <a:solidFill>
+                    <a:schemeClr val="bg1"/>
+                  </a:solidFill>
+                  <a:latin typeface="Arial" panose="020B0604020202020204" pitchFamily="34" charset="0"/>
+                  <a:cs typeface="Arial" panose="020B0604020202020204" pitchFamily="34" charset="0"/>
+                </a:rPr>
+                <a:t>MonoBehaviours</a:t>
+              </a:r>
+              <a:r>
+                <a:rPr lang="de-DE" b="1" dirty="0">
+                  <a:solidFill>
+                    <a:schemeClr val="bg1"/>
+                  </a:solidFill>
+                  <a:latin typeface="Arial" panose="020B0604020202020204" pitchFamily="34" charset="0"/>
+                  <a:cs typeface="Arial" panose="020B0604020202020204" pitchFamily="34" charset="0"/>
+                </a:rPr>
+                <a:t> </a:t>
+              </a:r>
+              <a:r>
+                <a:rPr lang="de-DE" b="1" dirty="0" err="1">
+                  <a:solidFill>
+                    <a:schemeClr val="bg1"/>
+                  </a:solidFill>
+                  <a:latin typeface="Arial" panose="020B0604020202020204" pitchFamily="34" charset="0"/>
+                  <a:cs typeface="Arial" panose="020B0604020202020204" pitchFamily="34" charset="0"/>
+                </a:rPr>
+                <a:t>work</a:t>
+              </a:r>
+              <a:endParaRPr lang="de-DE" b="1" dirty="0">
+                <a:solidFill>
+                  <a:schemeClr val="bg1"/>
+                </a:solidFill>
+                <a:latin typeface="Arial" panose="020B0604020202020204" pitchFamily="34" charset="0"/>
+                <a:cs typeface="Arial" panose="020B0604020202020204" pitchFamily="34" charset="0"/>
+              </a:endParaRPr>
+            </a:p>
+          </p:txBody>
+        </p:sp>
+      </p:grpSp>
+    </p:spTree>
+    <p:extLst>
+      <p:ext uri="{BB962C8B-B14F-4D97-AF65-F5344CB8AC3E}">
+        <p14:creationId xmlns:p14="http://schemas.microsoft.com/office/powerpoint/2010/main" val="52399988"/>
+      </p:ext>
+    </p:extLst>
+  </p:cSld>
+  <p:clrMapOvr>
+    <a:masterClrMapping/>
+  </p:clrMapOvr>
+</p:sld>
+</file>
+
+<file path=ppt/slides/slide5.xml><?xml version="1.0" encoding="utf-8"?>
+<p:sld xmlns:a="http://schemas.openxmlformats.org/drawingml/2006/main" xmlns:r="http://schemas.openxmlformats.org/officeDocument/2006/relationships" xmlns:p="http://schemas.openxmlformats.org/presentationml/2006/main">
+  <p:cSld>
+    <p:bg>
+      <p:bgPr>
+        <a:solidFill>
+          <a:schemeClr val="bg1"/>
+        </a:solidFill>
+        <a:effectLst/>
+      </p:bgPr>
+    </p:bg>
+    <p:spTree>
+      <p:nvGrpSpPr>
+        <p:cNvPr id="1" name=""/>
+        <p:cNvGrpSpPr/>
+        <p:nvPr/>
+      </p:nvGrpSpPr>
+      <p:grpSpPr>
+        <a:xfrm>
+          <a:off x="0" y="0"/>
+          <a:ext cx="0" cy="0"/>
+          <a:chOff x="0" y="0"/>
+          <a:chExt cx="0" cy="0"/>
+        </a:xfrm>
+      </p:grpSpPr>
+      <p:sp useBgFill="1">
+        <p:nvSpPr>
+          <p:cNvPr id="11" name="Rectangle 10">
+            <a:extLst>
+              <a:ext uri="{FF2B5EF4-FFF2-40B4-BE49-F238E27FC236}">
+                <a16:creationId xmlns:a16="http://schemas.microsoft.com/office/drawing/2014/main" id="{AB8C311F-7253-4AED-9701-7FC0708C41C7}"/>
+              </a:ext>
+              <a:ext uri="{C183D7F6-B498-43B3-948B-1728B52AA6E4}">
+                <adec:decorative xmlns:adec="http://schemas.microsoft.com/office/drawing/2017/decorative" val="1"/>
+              </a:ext>
+            </a:extLst>
+          </p:cNvPr>
+          <p:cNvSpPr>
+            <a:spLocks noGrp="1" noRot="1" noChangeAspect="1" noMove="1" noResize="1" noEditPoints="1" noAdjustHandles="1" noChangeArrowheads="1" noChangeShapeType="1" noTextEdit="1"/>
+          </p:cNvSpPr>
+          <p:nvPr>
+            <p:extLst>
+              <p:ext uri="{386F3935-93C4-4BCD-93E2-E3B085C9AB24}">
+                <p16:designElem xmlns:p16="http://schemas.microsoft.com/office/powerpoint/2015/main" val="1"/>
+              </p:ext>
+            </p:extLst>
+          </p:nvPr>
+        </p:nvSpPr>
+        <p:spPr>
+          <a:xfrm>
+            <a:off x="0" y="0"/>
+            <a:ext cx="12192000" cy="6858000"/>
+          </a:xfrm>
+          <a:prstGeom prst="rect">
+            <a:avLst/>
+          </a:prstGeom>
+          <a:ln w="12700" cap="flat" cmpd="sng" algn="ctr">
+            <a:noFill/>
+            <a:prstDash val="solid"/>
+            <a:miter lim="800000"/>
+          </a:ln>
+          <a:effectLst/>
+          <a:extLst>
+            <a:ext uri="{91240B29-F687-4F45-9708-019B960494DF}">
+              <a14:hiddenLine xmlns:a14="http://schemas.microsoft.com/office/drawing/2010/main" w="12700" cap="flat" cmpd="sng" algn="ctr">
+                <a:solidFill>
+                  <a:schemeClr val="accent1">
+                    <a:shade val="50000"/>
+                  </a:schemeClr>
+                </a:solidFill>
+                <a:prstDash val="solid"/>
+                <a:miter lim="800000"/>
+              </a14:hiddenLine>
+            </a:ext>
+          </a:extLst>
+        </p:spPr>
+        <p:style>
+          <a:lnRef idx="2">
+            <a:schemeClr val="accent1">
+              <a:shade val="50000"/>
+            </a:schemeClr>
+          </a:lnRef>
+          <a:fillRef idx="1">
+            <a:schemeClr val="accent1"/>
+          </a:fillRef>
+          <a:effectRef idx="0">
+            <a:schemeClr val="accent1"/>
+          </a:effectRef>
+          <a:fontRef idx="minor">
+            <a:schemeClr val="lt1"/>
+          </a:fontRef>
+        </p:style>
+        <p:txBody>
+          <a:bodyPr rtlCol="0" anchor="ctr"/>
+          <a:lstStyle/>
+          <a:p>
+            <a:pPr algn="ctr"/>
+            <a:endParaRPr lang="en-US"/>
+          </a:p>
+        </p:txBody>
+      </p:sp>
+      <p:sp>
+        <p:nvSpPr>
+          <p:cNvPr id="13" name="Rectangle 12">
+            <a:extLst>
+              <a:ext uri="{FF2B5EF4-FFF2-40B4-BE49-F238E27FC236}">
+                <a16:creationId xmlns:a16="http://schemas.microsoft.com/office/drawing/2014/main" id="{E2384209-CB15-4CDF-9D31-C44FD9A3F20D}"/>
+              </a:ext>
+              <a:ext uri="{C183D7F6-B498-43B3-948B-1728B52AA6E4}">
+                <adec:decorative xmlns:adec="http://schemas.microsoft.com/office/drawing/2017/decorative" val="1"/>
+              </a:ext>
+            </a:extLst>
+          </p:cNvPr>
+          <p:cNvSpPr>
+            <a:spLocks noGrp="1" noRot="1" noChangeAspect="1" noMove="1" noResize="1" noEditPoints="1" noAdjustHandles="1" noChangeArrowheads="1" noChangeShapeType="1" noTextEdit="1"/>
+          </p:cNvSpPr>
+          <p:nvPr>
+            <p:extLst>
+              <p:ext uri="{386F3935-93C4-4BCD-93E2-E3B085C9AB24}">
+                <p16:designElem xmlns:p16="http://schemas.microsoft.com/office/powerpoint/2015/main" val="1"/>
+              </p:ext>
+            </p:extLst>
+          </p:nvPr>
+        </p:nvSpPr>
+        <p:spPr>
+          <a:xfrm rot="16200000" flipH="1">
+            <a:off x="2666617" y="-2666188"/>
+            <a:ext cx="6858000" cy="12191233"/>
+          </a:xfrm>
+          <a:prstGeom prst="rect">
+            <a:avLst/>
+          </a:prstGeom>
+          <a:gradFill>
+            <a:gsLst>
+              <a:gs pos="8000">
+                <a:schemeClr val="accent1"/>
+              </a:gs>
+              <a:gs pos="100000">
+                <a:schemeClr val="accent1">
+                  <a:lumMod val="50000"/>
+                </a:schemeClr>
+              </a:gs>
+            </a:gsLst>
+            <a:lin ang="12000000" scaled="0"/>
+          </a:gradFill>
+          <a:ln>
+            <a:noFill/>
+          </a:ln>
+        </p:spPr>
+        <p:style>
+          <a:lnRef idx="2">
+            <a:schemeClr val="accent1">
+              <a:shade val="50000"/>
+            </a:schemeClr>
+          </a:lnRef>
+          <a:fillRef idx="1">
+            <a:schemeClr val="accent1"/>
+          </a:fillRef>
+          <a:effectRef idx="0">
+            <a:schemeClr val="accent1"/>
+          </a:effectRef>
+          <a:fontRef idx="minor">
+            <a:schemeClr val="lt1"/>
+          </a:fontRef>
+        </p:style>
+        <p:txBody>
+          <a:bodyPr rtlCol="0" anchor="ctr"/>
+          <a:lstStyle/>
+          <a:p>
+            <a:pPr algn="ctr"/>
+            <a:endParaRPr lang="en-US"/>
+          </a:p>
+        </p:txBody>
+      </p:sp>
+      <p:sp>
+        <p:nvSpPr>
+          <p:cNvPr id="15" name="Rectangle 14">
+            <a:extLst>
+              <a:ext uri="{FF2B5EF4-FFF2-40B4-BE49-F238E27FC236}">
+                <a16:creationId xmlns:a16="http://schemas.microsoft.com/office/drawing/2014/main" id="{2633B3B5-CC90-43F0-8714-D31D1F3F0209}"/>
+              </a:ext>
+              <a:ext uri="{C183D7F6-B498-43B3-948B-1728B52AA6E4}">
+                <adec:decorative xmlns:adec="http://schemas.microsoft.com/office/drawing/2017/decorative" val="1"/>
+              </a:ext>
+            </a:extLst>
+          </p:cNvPr>
+          <p:cNvSpPr>
+            <a:spLocks noGrp="1" noRot="1" noChangeAspect="1" noMove="1" noResize="1" noEditPoints="1" noAdjustHandles="1" noChangeArrowheads="1" noChangeShapeType="1" noTextEdit="1"/>
+          </p:cNvSpPr>
+          <p:nvPr>
+            <p:extLst>
+              <p:ext uri="{386F3935-93C4-4BCD-93E2-E3B085C9AB24}">
+                <p16:designElem xmlns:p16="http://schemas.microsoft.com/office/powerpoint/2015/main" val="1"/>
+              </p:ext>
+            </p:extLst>
+          </p:nvPr>
+        </p:nvSpPr>
+        <p:spPr>
+          <a:xfrm rot="10800000" flipH="1">
+            <a:off x="-2311" y="0"/>
+            <a:ext cx="9070846" cy="6857572"/>
+          </a:xfrm>
+          <a:prstGeom prst="rect">
+            <a:avLst/>
+          </a:prstGeom>
+          <a:gradFill>
+            <a:gsLst>
+              <a:gs pos="8000">
+                <a:srgbClr val="000000">
+                  <a:alpha val="52000"/>
+                </a:srgbClr>
+              </a:gs>
+              <a:gs pos="100000">
+                <a:schemeClr val="accent1"/>
+              </a:gs>
+            </a:gsLst>
+            <a:lin ang="4800000" scaled="0"/>
+          </a:gradFill>
+          <a:ln>
+            <a:noFill/>
+          </a:ln>
+        </p:spPr>
+        <p:style>
+          <a:lnRef idx="2">
+            <a:schemeClr val="accent1">
+              <a:shade val="50000"/>
+            </a:schemeClr>
+          </a:lnRef>
+          <a:fillRef idx="1">
+            <a:schemeClr val="accent1"/>
+          </a:fillRef>
+          <a:effectRef idx="0">
+            <a:schemeClr val="accent1"/>
+          </a:effectRef>
+          <a:fontRef idx="minor">
+            <a:schemeClr val="lt1"/>
+          </a:fontRef>
+        </p:style>
+        <p:txBody>
+          <a:bodyPr rtlCol="0" anchor="ctr"/>
+          <a:lstStyle/>
+          <a:p>
+            <a:pPr algn="ctr"/>
+            <a:endParaRPr lang="en-US"/>
+          </a:p>
+        </p:txBody>
+      </p:sp>
+      <p:sp>
+        <p:nvSpPr>
+          <p:cNvPr id="17" name="Rectangle 16">
+            <a:extLst>
+              <a:ext uri="{FF2B5EF4-FFF2-40B4-BE49-F238E27FC236}">
+                <a16:creationId xmlns:a16="http://schemas.microsoft.com/office/drawing/2014/main" id="{A8D57A06-A426-446D-B02C-A2DC6B62E45E}"/>
+              </a:ext>
+              <a:ext uri="{C183D7F6-B498-43B3-948B-1728B52AA6E4}">
+                <adec:decorative xmlns:adec="http://schemas.microsoft.com/office/drawing/2017/decorative" val="1"/>
+              </a:ext>
+            </a:extLst>
+          </p:cNvPr>
+          <p:cNvSpPr>
+            <a:spLocks noGrp="1" noRot="1" noChangeAspect="1" noMove="1" noResize="1" noEditPoints="1" noAdjustHandles="1" noChangeArrowheads="1" noChangeShapeType="1" noTextEdit="1"/>
+          </p:cNvSpPr>
+          <p:nvPr>
+            <p:extLst>
+              <p:ext uri="{386F3935-93C4-4BCD-93E2-E3B085C9AB24}">
+                <p16:designElem xmlns:p16="http://schemas.microsoft.com/office/powerpoint/2015/main" val="1"/>
+              </p:ext>
+            </p:extLst>
+          </p:nvPr>
+        </p:nvSpPr>
+        <p:spPr>
+          <a:xfrm rot="16200000" flipH="1">
+            <a:off x="3649491" y="-1685840"/>
+            <a:ext cx="4894564" cy="12193546"/>
+          </a:xfrm>
+          <a:prstGeom prst="rect">
+            <a:avLst/>
+          </a:prstGeom>
+          <a:gradFill>
+            <a:gsLst>
+              <a:gs pos="0">
+                <a:schemeClr val="accent5">
+                  <a:lumMod val="60000"/>
+                  <a:lumOff val="40000"/>
+                  <a:alpha val="0"/>
+                </a:schemeClr>
+              </a:gs>
+              <a:gs pos="100000">
+                <a:srgbClr val="000000">
+                  <a:alpha val="46000"/>
+                </a:srgbClr>
+              </a:gs>
+            </a:gsLst>
+            <a:lin ang="1200000" scaled="0"/>
+          </a:gradFill>
+          <a:ln>
+            <a:noFill/>
+          </a:ln>
+        </p:spPr>
+        <p:style>
+          <a:lnRef idx="2">
+            <a:schemeClr val="accent1">
+              <a:shade val="50000"/>
+            </a:schemeClr>
+          </a:lnRef>
+          <a:fillRef idx="1">
+            <a:schemeClr val="accent1"/>
+          </a:fillRef>
+          <a:effectRef idx="0">
+            <a:schemeClr val="accent1"/>
+          </a:effectRef>
+          <a:fontRef idx="minor">
+            <a:schemeClr val="lt1"/>
+          </a:fontRef>
+        </p:style>
+        <p:txBody>
+          <a:bodyPr rtlCol="0" anchor="ctr"/>
+          <a:lstStyle/>
+          <a:p>
+            <a:pPr algn="ctr"/>
+            <a:endParaRPr lang="en-US"/>
+          </a:p>
+        </p:txBody>
+      </p:sp>
+      <p:sp>
+        <p:nvSpPr>
+          <p:cNvPr id="14" name="Rechteck 13">
+            <a:extLst>
+              <a:ext uri="{FF2B5EF4-FFF2-40B4-BE49-F238E27FC236}">
+                <a16:creationId xmlns:a16="http://schemas.microsoft.com/office/drawing/2014/main" id="{476BDBD2-5732-4836-B12C-D7D665FC25AC}"/>
+              </a:ext>
+            </a:extLst>
+          </p:cNvPr>
+          <p:cNvSpPr/>
+          <p:nvPr/>
+        </p:nvSpPr>
+        <p:spPr>
+          <a:xfrm>
+            <a:off x="426720" y="499853"/>
+            <a:ext cx="11328400" cy="5858294"/>
+          </a:xfrm>
+          <a:prstGeom prst="rect">
+            <a:avLst/>
+          </a:prstGeom>
+          <a:solidFill>
+            <a:schemeClr val="tx1">
+              <a:lumMod val="85000"/>
+              <a:lumOff val="15000"/>
+            </a:schemeClr>
+          </a:solidFill>
+          <a:ln>
+            <a:noFill/>
+          </a:ln>
+        </p:spPr>
+        <p:style>
+          <a:lnRef idx="2">
+            <a:schemeClr val="accent1">
+              <a:shade val="50000"/>
+            </a:schemeClr>
+          </a:lnRef>
+          <a:fillRef idx="1">
+            <a:schemeClr val="accent1"/>
+          </a:fillRef>
+          <a:effectRef idx="0">
+            <a:schemeClr val="accent1"/>
+          </a:effectRef>
+          <a:fontRef idx="minor">
+            <a:schemeClr val="lt1"/>
+          </a:fontRef>
+        </p:style>
+        <p:txBody>
+          <a:bodyPr rtlCol="0" anchor="ctr"/>
+          <a:lstStyle/>
+          <a:p>
+            <a:pPr algn="ctr"/>
+            <a:endParaRPr lang="de-DE"/>
+          </a:p>
+        </p:txBody>
+      </p:sp>
+      <p:grpSp>
+        <p:nvGrpSpPr>
+          <p:cNvPr id="7" name="Gruppieren 6">
+            <a:extLst>
+              <a:ext uri="{FF2B5EF4-FFF2-40B4-BE49-F238E27FC236}">
+                <a16:creationId xmlns:a16="http://schemas.microsoft.com/office/drawing/2014/main" id="{5DEB3A40-6BDF-48C2-B270-590F3402DB75}"/>
+              </a:ext>
+            </a:extLst>
+          </p:cNvPr>
+          <p:cNvGrpSpPr/>
+          <p:nvPr/>
+        </p:nvGrpSpPr>
+        <p:grpSpPr>
+          <a:xfrm>
+            <a:off x="7431417" y="5359081"/>
+            <a:ext cx="4766735" cy="999066"/>
+            <a:chOff x="7425265" y="964584"/>
+            <a:chExt cx="4766735" cy="999066"/>
+          </a:xfrm>
+        </p:grpSpPr>
+        <p:sp>
+          <p:nvSpPr>
+            <p:cNvPr id="9" name="Rechteck: eine Ecke abgeschnitten 8">
+              <a:extLst>
+                <a:ext uri="{FF2B5EF4-FFF2-40B4-BE49-F238E27FC236}">
+                  <a16:creationId xmlns:a16="http://schemas.microsoft.com/office/drawing/2014/main" id="{22AB770B-D05A-46AB-8561-5ACAFE0FAB9D}"/>
+                </a:ext>
+              </a:extLst>
+            </p:cNvPr>
+            <p:cNvSpPr/>
+            <p:nvPr/>
+          </p:nvSpPr>
+          <p:spPr>
+            <a:xfrm flipH="1">
+              <a:off x="7425265" y="964584"/>
+              <a:ext cx="4766735" cy="999066"/>
+            </a:xfrm>
+            <a:prstGeom prst="snip1Rect">
+              <a:avLst>
+                <a:gd name="adj" fmla="val 50000"/>
+              </a:avLst>
+            </a:prstGeom>
+            <a:gradFill flip="none" rotWithShape="1">
+              <a:gsLst>
+                <a:gs pos="0">
+                  <a:srgbClr val="335797">
+                    <a:shade val="30000"/>
+                    <a:satMod val="115000"/>
+                  </a:srgbClr>
+                </a:gs>
+                <a:gs pos="50000">
+                  <a:srgbClr val="335797">
+                    <a:shade val="67500"/>
+                    <a:satMod val="115000"/>
+                  </a:srgbClr>
+                </a:gs>
+                <a:gs pos="100000">
+                  <a:srgbClr val="335797">
+                    <a:shade val="100000"/>
+                    <a:satMod val="115000"/>
+                  </a:srgbClr>
+                </a:gs>
+              </a:gsLst>
+              <a:path path="circle">
+                <a:fillToRect l="100000" t="100000"/>
+              </a:path>
+              <a:tileRect r="-100000" b="-100000"/>
+            </a:gradFill>
+            <a:ln w="19050">
+              <a:solidFill>
+                <a:schemeClr val="bg1"/>
+              </a:solidFill>
+            </a:ln>
+          </p:spPr>
+          <p:style>
+            <a:lnRef idx="2">
+              <a:schemeClr val="accent1">
+                <a:shade val="50000"/>
+              </a:schemeClr>
+            </a:lnRef>
+            <a:fillRef idx="1">
+              <a:schemeClr val="accent1"/>
+            </a:fillRef>
+            <a:effectRef idx="0">
+              <a:schemeClr val="accent1"/>
+            </a:effectRef>
+            <a:fontRef idx="minor">
+              <a:schemeClr val="lt1"/>
+            </a:fontRef>
+          </p:style>
+          <p:txBody>
+            <a:bodyPr rtlCol="0" anchor="ctr"/>
+            <a:lstStyle/>
+            <a:p>
+              <a:pPr algn="ctr"/>
+              <a:endParaRPr lang="de-DE" dirty="0"/>
+            </a:p>
+          </p:txBody>
+        </p:sp>
+        <p:sp>
+          <p:nvSpPr>
+            <p:cNvPr id="12" name="Textfeld 11">
+              <a:extLst>
+                <a:ext uri="{FF2B5EF4-FFF2-40B4-BE49-F238E27FC236}">
+                  <a16:creationId xmlns:a16="http://schemas.microsoft.com/office/drawing/2014/main" id="{2EC181D6-53AB-491F-8D53-469A91CA71E7}"/>
+                </a:ext>
+              </a:extLst>
+            </p:cNvPr>
+            <p:cNvSpPr txBox="1"/>
+            <p:nvPr/>
+          </p:nvSpPr>
+          <p:spPr>
+            <a:xfrm>
+              <a:off x="8159954" y="1002452"/>
+              <a:ext cx="3903131" cy="923330"/>
+            </a:xfrm>
+            <a:prstGeom prst="rect">
+              <a:avLst/>
+            </a:prstGeom>
+            <a:noFill/>
+          </p:spPr>
+          <p:txBody>
+            <a:bodyPr wrap="square" rtlCol="0">
+              <a:spAutoFit/>
+            </a:bodyPr>
+            <a:lstStyle/>
+            <a:p>
+              <a:r>
+                <a:rPr lang="de-DE" b="1" dirty="0">
+                  <a:solidFill>
+                    <a:schemeClr val="bg1"/>
+                  </a:solidFill>
+                  <a:latin typeface="Arial" panose="020B0604020202020204" pitchFamily="34" charset="0"/>
+                  <a:cs typeface="Arial" panose="020B0604020202020204" pitchFamily="34" charset="0"/>
+                </a:rPr>
+                <a:t>Add </a:t>
+              </a:r>
+              <a:r>
+                <a:rPr lang="de-DE" b="1" dirty="0" err="1">
+                  <a:solidFill>
+                    <a:schemeClr val="bg1"/>
+                  </a:solidFill>
+                  <a:latin typeface="Arial" panose="020B0604020202020204" pitchFamily="34" charset="0"/>
+                  <a:cs typeface="Arial" panose="020B0604020202020204" pitchFamily="34" charset="0"/>
+                </a:rPr>
+                <a:t>loads</a:t>
+              </a:r>
+              <a:r>
+                <a:rPr lang="de-DE" b="1" dirty="0">
+                  <a:solidFill>
+                    <a:schemeClr val="bg1"/>
+                  </a:solidFill>
+                  <a:latin typeface="Arial" panose="020B0604020202020204" pitchFamily="34" charset="0"/>
+                  <a:cs typeface="Arial" panose="020B0604020202020204" pitchFamily="34" charset="0"/>
+                </a:rPr>
+                <a:t> </a:t>
+              </a:r>
+              <a:r>
+                <a:rPr lang="de-DE" b="1" dirty="0" err="1">
+                  <a:solidFill>
+                    <a:schemeClr val="bg1"/>
+                  </a:solidFill>
+                  <a:latin typeface="Arial" panose="020B0604020202020204" pitchFamily="34" charset="0"/>
+                  <a:cs typeface="Arial" panose="020B0604020202020204" pitchFamily="34" charset="0"/>
+                </a:rPr>
+                <a:t>of</a:t>
+              </a:r>
+              <a:r>
+                <a:rPr lang="de-DE" b="1" dirty="0">
+                  <a:solidFill>
+                    <a:schemeClr val="bg1"/>
+                  </a:solidFill>
+                  <a:latin typeface="Arial" panose="020B0604020202020204" pitchFamily="34" charset="0"/>
+                  <a:cs typeface="Arial" panose="020B0604020202020204" pitchFamily="34" charset="0"/>
+                </a:rPr>
+                <a:t> </a:t>
+              </a:r>
+              <a:r>
+                <a:rPr lang="de-DE" b="1" dirty="0" err="1">
+                  <a:solidFill>
+                    <a:schemeClr val="bg1"/>
+                  </a:solidFill>
+                  <a:latin typeface="Arial" panose="020B0604020202020204" pitchFamily="34" charset="0"/>
+                  <a:cs typeface="Arial" panose="020B0604020202020204" pitchFamily="34" charset="0"/>
+                </a:rPr>
+                <a:t>custom</a:t>
+              </a:r>
+              <a:r>
+                <a:rPr lang="de-DE" b="1" dirty="0">
+                  <a:solidFill>
+                    <a:schemeClr val="bg1"/>
+                  </a:solidFill>
+                  <a:latin typeface="Arial" panose="020B0604020202020204" pitchFamily="34" charset="0"/>
+                  <a:cs typeface="Arial" panose="020B0604020202020204" pitchFamily="34" charset="0"/>
+                </a:rPr>
+                <a:t> </a:t>
+              </a:r>
+              <a:r>
+                <a:rPr lang="de-DE" b="1" dirty="0" err="1">
+                  <a:solidFill>
+                    <a:schemeClr val="bg1"/>
+                  </a:solidFill>
+                  <a:latin typeface="Arial" panose="020B0604020202020204" pitchFamily="34" charset="0"/>
+                  <a:cs typeface="Arial" panose="020B0604020202020204" pitchFamily="34" charset="0"/>
+                </a:rPr>
+                <a:t>functionality</a:t>
+              </a:r>
+              <a:r>
+                <a:rPr lang="de-DE" b="1" dirty="0">
+                  <a:solidFill>
+                    <a:schemeClr val="bg1"/>
+                  </a:solidFill>
+                  <a:latin typeface="Arial" panose="020B0604020202020204" pitchFamily="34" charset="0"/>
+                  <a:cs typeface="Arial" panose="020B0604020202020204" pitchFamily="34" charset="0"/>
+                </a:rPr>
+                <a:t> in a </a:t>
+              </a:r>
+              <a:r>
+                <a:rPr lang="de-DE" b="1" dirty="0" err="1">
+                  <a:solidFill>
+                    <a:schemeClr val="bg1"/>
+                  </a:solidFill>
+                  <a:latin typeface="Arial" panose="020B0604020202020204" pitchFamily="34" charset="0"/>
+                  <a:cs typeface="Arial" panose="020B0604020202020204" pitchFamily="34" charset="0"/>
+                </a:rPr>
+                <a:t>way</a:t>
+              </a:r>
+              <a:r>
+                <a:rPr lang="de-DE" b="1" dirty="0">
+                  <a:solidFill>
+                    <a:schemeClr val="bg1"/>
+                  </a:solidFill>
+                  <a:latin typeface="Arial" panose="020B0604020202020204" pitchFamily="34" charset="0"/>
+                  <a:cs typeface="Arial" panose="020B0604020202020204" pitchFamily="34" charset="0"/>
+                </a:rPr>
+                <a:t> </a:t>
+              </a:r>
+              <a:r>
+                <a:rPr lang="de-DE" b="1" dirty="0" err="1">
+                  <a:solidFill>
+                    <a:schemeClr val="bg1"/>
+                  </a:solidFill>
+                  <a:latin typeface="Arial" panose="020B0604020202020204" pitchFamily="34" charset="0"/>
+                  <a:cs typeface="Arial" panose="020B0604020202020204" pitchFamily="34" charset="0"/>
+                </a:rPr>
+                <a:t>similar</a:t>
+              </a:r>
+              <a:r>
+                <a:rPr lang="de-DE" b="1" dirty="0">
+                  <a:solidFill>
+                    <a:schemeClr val="bg1"/>
+                  </a:solidFill>
+                  <a:latin typeface="Arial" panose="020B0604020202020204" pitchFamily="34" charset="0"/>
+                  <a:cs typeface="Arial" panose="020B0604020202020204" pitchFamily="34" charset="0"/>
+                </a:rPr>
+                <a:t> </a:t>
+              </a:r>
+              <a:r>
+                <a:rPr lang="de-DE" b="1" dirty="0" err="1">
+                  <a:solidFill>
+                    <a:schemeClr val="bg1"/>
+                  </a:solidFill>
+                  <a:latin typeface="Arial" panose="020B0604020202020204" pitchFamily="34" charset="0"/>
+                  <a:cs typeface="Arial" panose="020B0604020202020204" pitchFamily="34" charset="0"/>
+                </a:rPr>
+                <a:t>to</a:t>
+              </a:r>
+              <a:r>
+                <a:rPr lang="de-DE" b="1" dirty="0">
+                  <a:solidFill>
+                    <a:schemeClr val="bg1"/>
+                  </a:solidFill>
+                  <a:latin typeface="Arial" panose="020B0604020202020204" pitchFamily="34" charset="0"/>
+                  <a:cs typeface="Arial" panose="020B0604020202020204" pitchFamily="34" charset="0"/>
+                </a:rPr>
+                <a:t> </a:t>
+              </a:r>
+              <a:r>
+                <a:rPr lang="de-DE" b="1" dirty="0" err="1">
+                  <a:solidFill>
+                    <a:schemeClr val="bg1"/>
+                  </a:solidFill>
+                  <a:latin typeface="Arial" panose="020B0604020202020204" pitchFamily="34" charset="0"/>
+                  <a:cs typeface="Arial" panose="020B0604020202020204" pitchFamily="34" charset="0"/>
+                </a:rPr>
+                <a:t>how</a:t>
+              </a:r>
+              <a:r>
+                <a:rPr lang="de-DE" b="1" dirty="0">
+                  <a:solidFill>
+                    <a:schemeClr val="bg1"/>
+                  </a:solidFill>
+                  <a:latin typeface="Arial" panose="020B0604020202020204" pitchFamily="34" charset="0"/>
+                  <a:cs typeface="Arial" panose="020B0604020202020204" pitchFamily="34" charset="0"/>
+                </a:rPr>
+                <a:t> </a:t>
+              </a:r>
+              <a:r>
+                <a:rPr lang="de-DE" b="1" dirty="0" err="1">
+                  <a:solidFill>
+                    <a:schemeClr val="bg1"/>
+                  </a:solidFill>
+                  <a:latin typeface="Arial" panose="020B0604020202020204" pitchFamily="34" charset="0"/>
+                  <a:cs typeface="Arial" panose="020B0604020202020204" pitchFamily="34" charset="0"/>
+                </a:rPr>
+                <a:t>Unity‘s</a:t>
+              </a:r>
+              <a:r>
+                <a:rPr lang="de-DE" b="1" dirty="0">
+                  <a:solidFill>
+                    <a:schemeClr val="bg1"/>
+                  </a:solidFill>
+                  <a:latin typeface="Arial" panose="020B0604020202020204" pitchFamily="34" charset="0"/>
+                  <a:cs typeface="Arial" panose="020B0604020202020204" pitchFamily="34" charset="0"/>
+                </a:rPr>
+                <a:t> </a:t>
+              </a:r>
+              <a:r>
+                <a:rPr lang="de-DE" b="1" dirty="0" err="1">
+                  <a:solidFill>
+                    <a:schemeClr val="bg1"/>
+                  </a:solidFill>
+                  <a:latin typeface="Arial" panose="020B0604020202020204" pitchFamily="34" charset="0"/>
+                  <a:cs typeface="Arial" panose="020B0604020202020204" pitchFamily="34" charset="0"/>
+                </a:rPr>
+                <a:t>MonoBehaviours</a:t>
+              </a:r>
+              <a:r>
+                <a:rPr lang="de-DE" b="1" dirty="0">
+                  <a:solidFill>
+                    <a:schemeClr val="bg1"/>
+                  </a:solidFill>
+                  <a:latin typeface="Arial" panose="020B0604020202020204" pitchFamily="34" charset="0"/>
+                  <a:cs typeface="Arial" panose="020B0604020202020204" pitchFamily="34" charset="0"/>
+                </a:rPr>
+                <a:t> </a:t>
+              </a:r>
+              <a:r>
+                <a:rPr lang="de-DE" b="1" dirty="0" err="1">
+                  <a:solidFill>
+                    <a:schemeClr val="bg1"/>
+                  </a:solidFill>
+                  <a:latin typeface="Arial" panose="020B0604020202020204" pitchFamily="34" charset="0"/>
+                  <a:cs typeface="Arial" panose="020B0604020202020204" pitchFamily="34" charset="0"/>
+                </a:rPr>
+                <a:t>work</a:t>
+              </a:r>
+              <a:endParaRPr lang="de-DE" b="1" dirty="0">
+                <a:solidFill>
+                  <a:schemeClr val="bg1"/>
+                </a:solidFill>
+                <a:latin typeface="Arial" panose="020B0604020202020204" pitchFamily="34" charset="0"/>
+                <a:cs typeface="Arial" panose="020B0604020202020204" pitchFamily="34" charset="0"/>
+              </a:endParaRPr>
+            </a:p>
+          </p:txBody>
+        </p:sp>
+      </p:grpSp>
+      <p:pic>
+        <p:nvPicPr>
+          <p:cNvPr id="18" name="Grafik 17" descr="Ein Bild, das Text enthält.&#10;&#10;Automatisch generierte Beschreibung">
+            <a:extLst>
+              <a:ext uri="{FF2B5EF4-FFF2-40B4-BE49-F238E27FC236}">
+                <a16:creationId xmlns:a16="http://schemas.microsoft.com/office/drawing/2014/main" id="{1C619F98-67A6-4E5F-AD1A-E9064ACED4A6}"/>
+              </a:ext>
+            </a:extLst>
+          </p:cNvPr>
+          <p:cNvPicPr>
+            <a:picLocks noChangeAspect="1"/>
+          </p:cNvPicPr>
+          <p:nvPr/>
+        </p:nvPicPr>
+        <p:blipFill rotWithShape="1">
+          <a:blip r:embed="rId2">
+            <a:extLst>
+              <a:ext uri="{28A0092B-C50C-407E-A947-70E740481C1C}">
+                <a14:useLocalDpi xmlns:a14="http://schemas.microsoft.com/office/drawing/2010/main" val="0"/>
+              </a:ext>
+            </a:extLst>
+          </a:blip>
+          <a:srcRect b="74626"/>
+          <a:stretch/>
+        </p:blipFill>
+        <p:spPr>
+          <a:xfrm>
+            <a:off x="653031" y="734972"/>
+            <a:ext cx="5442969" cy="1827798"/>
+          </a:xfrm>
+          <a:prstGeom prst="rect">
+            <a:avLst/>
+          </a:prstGeom>
+        </p:spPr>
+      </p:pic>
+      <p:pic>
+        <p:nvPicPr>
+          <p:cNvPr id="20" name="Grafik 19">
+            <a:extLst>
+              <a:ext uri="{FF2B5EF4-FFF2-40B4-BE49-F238E27FC236}">
+                <a16:creationId xmlns:a16="http://schemas.microsoft.com/office/drawing/2014/main" id="{E5C525CF-CE31-4E22-B9AF-5B7D8626D590}"/>
+              </a:ext>
+            </a:extLst>
+          </p:cNvPr>
+          <p:cNvPicPr>
+            <a:picLocks noChangeAspect="1"/>
+          </p:cNvPicPr>
+          <p:nvPr/>
+        </p:nvPicPr>
+        <p:blipFill rotWithShape="1">
+          <a:blip r:embed="rId2"/>
+          <a:srcRect t="28738" b="30187"/>
+          <a:stretch/>
+        </p:blipFill>
+        <p:spPr>
+          <a:xfrm>
+            <a:off x="6322311" y="2220391"/>
+            <a:ext cx="4810388" cy="2614940"/>
+          </a:xfrm>
+          <a:prstGeom prst="rect">
+            <a:avLst/>
+          </a:prstGeom>
+        </p:spPr>
+      </p:pic>
+      <p:pic>
+        <p:nvPicPr>
+          <p:cNvPr id="22" name="Grafik 21">
+            <a:extLst>
+              <a:ext uri="{FF2B5EF4-FFF2-40B4-BE49-F238E27FC236}">
+                <a16:creationId xmlns:a16="http://schemas.microsoft.com/office/drawing/2014/main" id="{2A652D84-79A8-4600-9AE0-1AEB45F7542D}"/>
+              </a:ext>
+            </a:extLst>
+          </p:cNvPr>
+          <p:cNvPicPr>
+            <a:picLocks noChangeAspect="1"/>
+          </p:cNvPicPr>
+          <p:nvPr/>
+        </p:nvPicPr>
+        <p:blipFill rotWithShape="1">
+          <a:blip r:embed="rId2"/>
+          <a:srcRect t="72779"/>
+          <a:stretch/>
+        </p:blipFill>
+        <p:spPr>
+          <a:xfrm>
+            <a:off x="781754" y="4153970"/>
+            <a:ext cx="5073697" cy="1827798"/>
+          </a:xfrm>
+          <a:prstGeom prst="rect">
+            <a:avLst/>
+          </a:prstGeom>
+        </p:spPr>
+      </p:pic>
+    </p:spTree>
+    <p:extLst>
+      <p:ext uri="{BB962C8B-B14F-4D97-AF65-F5344CB8AC3E}">
+        <p14:creationId xmlns:p14="http://schemas.microsoft.com/office/powerpoint/2010/main" val="1254382496"/>
+      </p:ext>
+    </p:extLst>
+  </p:cSld>
+  <p:clrMapOvr>
+    <a:masterClrMapping/>
+  </p:clrMapOvr>
+</p:sld>
+</file>
+
+<file path=ppt/slides/slide6.xml><?xml version="1.0" encoding="utf-8"?>
+<p:sld xmlns:a="http://schemas.openxmlformats.org/drawingml/2006/main" xmlns:r="http://schemas.openxmlformats.org/officeDocument/2006/relationships" xmlns:p="http://schemas.openxmlformats.org/presentationml/2006/main">
+  <p:cSld>
+    <p:bg>
+      <p:bgPr>
+        <a:solidFill>
+          <a:schemeClr val="bg1"/>
+        </a:solidFill>
+        <a:effectLst/>
+      </p:bgPr>
+    </p:bg>
+    <p:spTree>
+      <p:nvGrpSpPr>
+        <p:cNvPr id="1" name=""/>
+        <p:cNvGrpSpPr/>
+        <p:nvPr/>
+      </p:nvGrpSpPr>
+      <p:grpSpPr>
+        <a:xfrm>
+          <a:off x="0" y="0"/>
+          <a:ext cx="0" cy="0"/>
+          <a:chOff x="0" y="0"/>
+          <a:chExt cx="0" cy="0"/>
+        </a:xfrm>
+      </p:grpSpPr>
+      <p:sp useBgFill="1">
+        <p:nvSpPr>
+          <p:cNvPr id="11" name="Rectangle 10">
+            <a:extLst>
+              <a:ext uri="{FF2B5EF4-FFF2-40B4-BE49-F238E27FC236}">
+                <a16:creationId xmlns:a16="http://schemas.microsoft.com/office/drawing/2014/main" id="{AB8C311F-7253-4AED-9701-7FC0708C41C7}"/>
+              </a:ext>
+              <a:ext uri="{C183D7F6-B498-43B3-948B-1728B52AA6E4}">
+                <adec:decorative xmlns:adec="http://schemas.microsoft.com/office/drawing/2017/decorative" val="1"/>
+              </a:ext>
+            </a:extLst>
+          </p:cNvPr>
+          <p:cNvSpPr>
+            <a:spLocks noGrp="1" noRot="1" noChangeAspect="1" noMove="1" noResize="1" noEditPoints="1" noAdjustHandles="1" noChangeArrowheads="1" noChangeShapeType="1" noTextEdit="1"/>
+          </p:cNvSpPr>
+          <p:nvPr>
+            <p:extLst>
+              <p:ext uri="{386F3935-93C4-4BCD-93E2-E3B085C9AB24}">
+                <p16:designElem xmlns:p16="http://schemas.microsoft.com/office/powerpoint/2015/main" val="1"/>
+              </p:ext>
+            </p:extLst>
+          </p:nvPr>
+        </p:nvSpPr>
+        <p:spPr>
+          <a:xfrm>
+            <a:off x="0" y="0"/>
+            <a:ext cx="12192000" cy="6858000"/>
+          </a:xfrm>
+          <a:prstGeom prst="rect">
+            <a:avLst/>
+          </a:prstGeom>
+          <a:ln w="12700" cap="flat" cmpd="sng" algn="ctr">
+            <a:noFill/>
+            <a:prstDash val="solid"/>
+            <a:miter lim="800000"/>
+          </a:ln>
+          <a:effectLst/>
+          <a:extLst>
+            <a:ext uri="{91240B29-F687-4F45-9708-019B960494DF}">
+              <a14:hiddenLine xmlns:a14="http://schemas.microsoft.com/office/drawing/2010/main" w="12700" cap="flat" cmpd="sng" algn="ctr">
+                <a:solidFill>
+                  <a:schemeClr val="accent1">
+                    <a:shade val="50000"/>
+                  </a:schemeClr>
+                </a:solidFill>
+                <a:prstDash val="solid"/>
+                <a:miter lim="800000"/>
+              </a14:hiddenLine>
+            </a:ext>
+          </a:extLst>
+        </p:spPr>
+        <p:style>
+          <a:lnRef idx="2">
+            <a:schemeClr val="accent1">
+              <a:shade val="50000"/>
+            </a:schemeClr>
+          </a:lnRef>
+          <a:fillRef idx="1">
+            <a:schemeClr val="accent1"/>
+          </a:fillRef>
+          <a:effectRef idx="0">
+            <a:schemeClr val="accent1"/>
+          </a:effectRef>
+          <a:fontRef idx="minor">
+            <a:schemeClr val="lt1"/>
+          </a:fontRef>
+        </p:style>
+        <p:txBody>
+          <a:bodyPr rtlCol="0" anchor="ctr"/>
+          <a:lstStyle/>
+          <a:p>
+            <a:pPr algn="ctr"/>
+            <a:endParaRPr lang="en-US"/>
+          </a:p>
+        </p:txBody>
+      </p:sp>
+      <p:sp>
+        <p:nvSpPr>
+          <p:cNvPr id="13" name="Rectangle 12">
+            <a:extLst>
+              <a:ext uri="{FF2B5EF4-FFF2-40B4-BE49-F238E27FC236}">
+                <a16:creationId xmlns:a16="http://schemas.microsoft.com/office/drawing/2014/main" id="{E2384209-CB15-4CDF-9D31-C44FD9A3F20D}"/>
+              </a:ext>
+              <a:ext uri="{C183D7F6-B498-43B3-948B-1728B52AA6E4}">
+                <adec:decorative xmlns:adec="http://schemas.microsoft.com/office/drawing/2017/decorative" val="1"/>
+              </a:ext>
+            </a:extLst>
+          </p:cNvPr>
+          <p:cNvSpPr>
+            <a:spLocks noGrp="1" noRot="1" noChangeAspect="1" noMove="1" noResize="1" noEditPoints="1" noAdjustHandles="1" noChangeArrowheads="1" noChangeShapeType="1" noTextEdit="1"/>
+          </p:cNvSpPr>
+          <p:nvPr>
+            <p:extLst>
+              <p:ext uri="{386F3935-93C4-4BCD-93E2-E3B085C9AB24}">
+                <p16:designElem xmlns:p16="http://schemas.microsoft.com/office/powerpoint/2015/main" val="1"/>
+              </p:ext>
+            </p:extLst>
+          </p:nvPr>
+        </p:nvSpPr>
+        <p:spPr>
+          <a:xfrm rot="16200000" flipH="1">
+            <a:off x="2666617" y="-2666188"/>
+            <a:ext cx="6858000" cy="12191233"/>
+          </a:xfrm>
+          <a:prstGeom prst="rect">
+            <a:avLst/>
+          </a:prstGeom>
+          <a:gradFill>
+            <a:gsLst>
+              <a:gs pos="8000">
+                <a:schemeClr val="accent1"/>
+              </a:gs>
+              <a:gs pos="100000">
+                <a:schemeClr val="accent1">
+                  <a:lumMod val="50000"/>
+                </a:schemeClr>
+              </a:gs>
+            </a:gsLst>
+            <a:lin ang="12000000" scaled="0"/>
+          </a:gradFill>
+          <a:ln>
+            <a:noFill/>
+          </a:ln>
+        </p:spPr>
+        <p:style>
+          <a:lnRef idx="2">
+            <a:schemeClr val="accent1">
+              <a:shade val="50000"/>
+            </a:schemeClr>
+          </a:lnRef>
+          <a:fillRef idx="1">
+            <a:schemeClr val="accent1"/>
+          </a:fillRef>
+          <a:effectRef idx="0">
+            <a:schemeClr val="accent1"/>
+          </a:effectRef>
+          <a:fontRef idx="minor">
+            <a:schemeClr val="lt1"/>
+          </a:fontRef>
+        </p:style>
+        <p:txBody>
+          <a:bodyPr rtlCol="0" anchor="ctr"/>
+          <a:lstStyle/>
+          <a:p>
+            <a:pPr algn="ctr"/>
+            <a:endParaRPr lang="en-US"/>
+          </a:p>
+        </p:txBody>
+      </p:sp>
+      <p:sp>
+        <p:nvSpPr>
+          <p:cNvPr id="15" name="Rectangle 14">
+            <a:extLst>
+              <a:ext uri="{FF2B5EF4-FFF2-40B4-BE49-F238E27FC236}">
+                <a16:creationId xmlns:a16="http://schemas.microsoft.com/office/drawing/2014/main" id="{2633B3B5-CC90-43F0-8714-D31D1F3F0209}"/>
+              </a:ext>
+              <a:ext uri="{C183D7F6-B498-43B3-948B-1728B52AA6E4}">
+                <adec:decorative xmlns:adec="http://schemas.microsoft.com/office/drawing/2017/decorative" val="1"/>
+              </a:ext>
+            </a:extLst>
+          </p:cNvPr>
+          <p:cNvSpPr>
+            <a:spLocks noGrp="1" noRot="1" noChangeAspect="1" noMove="1" noResize="1" noEditPoints="1" noAdjustHandles="1" noChangeArrowheads="1" noChangeShapeType="1" noTextEdit="1"/>
+          </p:cNvSpPr>
+          <p:nvPr>
+            <p:extLst>
+              <p:ext uri="{386F3935-93C4-4BCD-93E2-E3B085C9AB24}">
+                <p16:designElem xmlns:p16="http://schemas.microsoft.com/office/powerpoint/2015/main" val="1"/>
+              </p:ext>
+            </p:extLst>
+          </p:nvPr>
+        </p:nvSpPr>
+        <p:spPr>
+          <a:xfrm rot="10800000" flipH="1">
+            <a:off x="-2311" y="0"/>
+            <a:ext cx="9070846" cy="6857572"/>
+          </a:xfrm>
+          <a:prstGeom prst="rect">
+            <a:avLst/>
+          </a:prstGeom>
+          <a:gradFill>
+            <a:gsLst>
+              <a:gs pos="8000">
+                <a:srgbClr val="000000">
+                  <a:alpha val="52000"/>
+                </a:srgbClr>
+              </a:gs>
+              <a:gs pos="100000">
+                <a:schemeClr val="accent1"/>
+              </a:gs>
+            </a:gsLst>
+            <a:lin ang="4800000" scaled="0"/>
+          </a:gradFill>
+          <a:ln>
+            <a:noFill/>
+          </a:ln>
+        </p:spPr>
+        <p:style>
+          <a:lnRef idx="2">
+            <a:schemeClr val="accent1">
+              <a:shade val="50000"/>
+            </a:schemeClr>
+          </a:lnRef>
+          <a:fillRef idx="1">
+            <a:schemeClr val="accent1"/>
+          </a:fillRef>
+          <a:effectRef idx="0">
+            <a:schemeClr val="accent1"/>
+          </a:effectRef>
+          <a:fontRef idx="minor">
+            <a:schemeClr val="lt1"/>
+          </a:fontRef>
+        </p:style>
+        <p:txBody>
+          <a:bodyPr rtlCol="0" anchor="ctr"/>
+          <a:lstStyle/>
+          <a:p>
+            <a:pPr algn="ctr"/>
+            <a:endParaRPr lang="en-US"/>
+          </a:p>
+        </p:txBody>
+      </p:sp>
+      <p:sp>
+        <p:nvSpPr>
+          <p:cNvPr id="17" name="Rectangle 16">
+            <a:extLst>
+              <a:ext uri="{FF2B5EF4-FFF2-40B4-BE49-F238E27FC236}">
+                <a16:creationId xmlns:a16="http://schemas.microsoft.com/office/drawing/2014/main" id="{A8D57A06-A426-446D-B02C-A2DC6B62E45E}"/>
+              </a:ext>
+              <a:ext uri="{C183D7F6-B498-43B3-948B-1728B52AA6E4}">
+                <adec:decorative xmlns:adec="http://schemas.microsoft.com/office/drawing/2017/decorative" val="1"/>
+              </a:ext>
+            </a:extLst>
+          </p:cNvPr>
+          <p:cNvSpPr>
+            <a:spLocks noGrp="1" noRot="1" noChangeAspect="1" noMove="1" noResize="1" noEditPoints="1" noAdjustHandles="1" noChangeArrowheads="1" noChangeShapeType="1" noTextEdit="1"/>
+          </p:cNvSpPr>
+          <p:nvPr>
+            <p:extLst>
+              <p:ext uri="{386F3935-93C4-4BCD-93E2-E3B085C9AB24}">
+                <p16:designElem xmlns:p16="http://schemas.microsoft.com/office/powerpoint/2015/main" val="1"/>
+              </p:ext>
+            </p:extLst>
+          </p:nvPr>
+        </p:nvSpPr>
+        <p:spPr>
+          <a:xfrm rot="16200000" flipH="1">
+            <a:off x="3649491" y="-1685840"/>
+            <a:ext cx="4894564" cy="12193546"/>
+          </a:xfrm>
+          <a:prstGeom prst="rect">
+            <a:avLst/>
+          </a:prstGeom>
+          <a:gradFill>
+            <a:gsLst>
+              <a:gs pos="0">
+                <a:schemeClr val="accent5">
+                  <a:lumMod val="60000"/>
+                  <a:lumOff val="40000"/>
+                  <a:alpha val="0"/>
+                </a:schemeClr>
+              </a:gs>
+              <a:gs pos="100000">
+                <a:srgbClr val="000000">
+                  <a:alpha val="46000"/>
+                </a:srgbClr>
+              </a:gs>
+            </a:gsLst>
+            <a:lin ang="1200000" scaled="0"/>
+          </a:gradFill>
+          <a:ln>
+            <a:noFill/>
+          </a:ln>
+        </p:spPr>
+        <p:style>
+          <a:lnRef idx="2">
+            <a:schemeClr val="accent1">
+              <a:shade val="50000"/>
+            </a:schemeClr>
+          </a:lnRef>
+          <a:fillRef idx="1">
+            <a:schemeClr val="accent1"/>
+          </a:fillRef>
+          <a:effectRef idx="0">
+            <a:schemeClr val="accent1"/>
+          </a:effectRef>
+          <a:fontRef idx="minor">
+            <a:schemeClr val="lt1"/>
+          </a:fontRef>
+        </p:style>
+        <p:txBody>
+          <a:bodyPr rtlCol="0" anchor="ctr"/>
+          <a:lstStyle/>
+          <a:p>
+            <a:pPr algn="ctr"/>
+            <a:endParaRPr lang="en-US"/>
+          </a:p>
+        </p:txBody>
+      </p:sp>
+      <p:sp>
+        <p:nvSpPr>
+          <p:cNvPr id="14" name="Rechteck 13">
+            <a:extLst>
+              <a:ext uri="{FF2B5EF4-FFF2-40B4-BE49-F238E27FC236}">
+                <a16:creationId xmlns:a16="http://schemas.microsoft.com/office/drawing/2014/main" id="{476BDBD2-5732-4836-B12C-D7D665FC25AC}"/>
+              </a:ext>
+            </a:extLst>
+          </p:cNvPr>
+          <p:cNvSpPr/>
+          <p:nvPr/>
+        </p:nvSpPr>
+        <p:spPr>
+          <a:xfrm>
+            <a:off x="426720" y="499853"/>
+            <a:ext cx="11328400" cy="5858294"/>
+          </a:xfrm>
+          <a:prstGeom prst="rect">
+            <a:avLst/>
+          </a:prstGeom>
+          <a:solidFill>
+            <a:schemeClr val="tx1">
+              <a:lumMod val="85000"/>
+              <a:lumOff val="15000"/>
+            </a:schemeClr>
+          </a:solidFill>
+          <a:ln>
+            <a:noFill/>
+          </a:ln>
+        </p:spPr>
+        <p:style>
+          <a:lnRef idx="2">
+            <a:schemeClr val="accent1">
+              <a:shade val="50000"/>
+            </a:schemeClr>
+          </a:lnRef>
+          <a:fillRef idx="1">
+            <a:schemeClr val="accent1"/>
+          </a:fillRef>
+          <a:effectRef idx="0">
+            <a:schemeClr val="accent1"/>
+          </a:effectRef>
+          <a:fontRef idx="minor">
+            <a:schemeClr val="lt1"/>
+          </a:fontRef>
+        </p:style>
+        <p:txBody>
+          <a:bodyPr rtlCol="0" anchor="ctr"/>
+          <a:lstStyle/>
+          <a:p>
+            <a:pPr algn="ctr"/>
+            <a:endParaRPr lang="de-DE"/>
+          </a:p>
+        </p:txBody>
+      </p:sp>
       <p:grpSp>
         <p:nvGrpSpPr>
           <p:cNvPr id="7" name="Gruppieren 6">
@@ -6300,7 +7928,7 @@
 </p:sld>
 </file>
 
-<file path=ppt/slides/slide5.xml><?xml version="1.0" encoding="utf-8"?>
+<file path=ppt/slides/slide7.xml><?xml version="1.0" encoding="utf-8"?>
 <p:sld xmlns:a="http://schemas.openxmlformats.org/drawingml/2006/main" xmlns:r="http://schemas.openxmlformats.org/officeDocument/2006/relationships" xmlns:p="http://schemas.openxmlformats.org/presentationml/2006/main">
   <p:cSld>
     <p:bg>
@@ -7122,7 +8750,7 @@
 </p:sld>
 </file>
 
-<file path=ppt/slides/slide6.xml><?xml version="1.0" encoding="utf-8"?>
+<file path=ppt/slides/slide8.xml><?xml version="1.0" encoding="utf-8"?>
 <p:sld xmlns:a="http://schemas.openxmlformats.org/drawingml/2006/main" xmlns:r="http://schemas.openxmlformats.org/officeDocument/2006/relationships" xmlns:p="http://schemas.openxmlformats.org/presentationml/2006/main">
   <p:cSld>
     <p:bg>
@@ -7614,7 +9242,7 @@
           </p:nvSpPr>
           <p:spPr>
             <a:xfrm>
-              <a:off x="8091128" y="1002452"/>
+              <a:off x="8063894" y="1001063"/>
               <a:ext cx="3903131" cy="923330"/>
             </a:xfrm>
             <a:prstGeom prst="rect">
@@ -7629,6 +9257,16 @@
             <a:lstStyle/>
             <a:p>
               <a:r>
+                <a:rPr lang="de-DE" b="1" dirty="0" err="1">
+                  <a:solidFill>
+                    <a:schemeClr val="bg1"/>
+                  </a:solidFill>
+                  <a:latin typeface="Arial" panose="020B0604020202020204" pitchFamily="34" charset="0"/>
+                  <a:cs typeface="Arial" panose="020B0604020202020204" pitchFamily="34" charset="0"/>
+                </a:rPr>
+                <a:t>With</a:t>
+              </a:r>
+              <a:r>
                 <a:rPr lang="de-DE" b="1" dirty="0">
                   <a:solidFill>
                     <a:schemeClr val="bg1"/>
@@ -7636,7 +9274,7 @@
                   <a:latin typeface="Arial" panose="020B0604020202020204" pitchFamily="34" charset="0"/>
                   <a:cs typeface="Arial" panose="020B0604020202020204" pitchFamily="34" charset="0"/>
                 </a:rPr>
-                <a:t>Change </a:t>
+                <a:t> </a:t>
               </a:r>
               <a:r>
                 <a:rPr lang="de-DE" b="1" dirty="0" err="1">
@@ -7646,7 +9284,7 @@
                   <a:latin typeface="Arial" panose="020B0604020202020204" pitchFamily="34" charset="0"/>
                   <a:cs typeface="Arial" panose="020B0604020202020204" pitchFamily="34" charset="0"/>
                 </a:rPr>
-                <a:t>the</a:t>
+                <a:t>TextMeshPro</a:t>
               </a:r>
               <a:r>
                 <a:rPr lang="de-DE" b="1" dirty="0">
@@ -7656,802 +9294,7 @@
                   <a:latin typeface="Arial" panose="020B0604020202020204" pitchFamily="34" charset="0"/>
                   <a:cs typeface="Arial" panose="020B0604020202020204" pitchFamily="34" charset="0"/>
                 </a:rPr>
-                <a:t> </a:t>
-              </a:r>
-              <a:r>
-                <a:rPr lang="de-DE" b="1" dirty="0" err="1">
-                  <a:solidFill>
-                    <a:schemeClr val="bg1"/>
-                  </a:solidFill>
-                  <a:latin typeface="Arial" panose="020B0604020202020204" pitchFamily="34" charset="0"/>
-                  <a:cs typeface="Arial" panose="020B0604020202020204" pitchFamily="34" charset="0"/>
-                </a:rPr>
-                <a:t>course</a:t>
-              </a:r>
-              <a:r>
-                <a:rPr lang="de-DE" b="1" dirty="0">
-                  <a:solidFill>
-                    <a:schemeClr val="bg1"/>
-                  </a:solidFill>
-                  <a:latin typeface="Arial" panose="020B0604020202020204" pitchFamily="34" charset="0"/>
-                  <a:cs typeface="Arial" panose="020B0604020202020204" pitchFamily="34" charset="0"/>
-                </a:rPr>
-                <a:t> </a:t>
-              </a:r>
-              <a:r>
-                <a:rPr lang="de-DE" b="1" dirty="0" err="1">
-                  <a:solidFill>
-                    <a:schemeClr val="bg1"/>
-                  </a:solidFill>
-                  <a:latin typeface="Arial" panose="020B0604020202020204" pitchFamily="34" charset="0"/>
-                  <a:cs typeface="Arial" panose="020B0604020202020204" pitchFamily="34" charset="0"/>
-                </a:rPr>
-                <a:t>of</a:t>
-              </a:r>
-              <a:r>
-                <a:rPr lang="de-DE" b="1" dirty="0">
-                  <a:solidFill>
-                    <a:schemeClr val="bg1"/>
-                  </a:solidFill>
-                  <a:latin typeface="Arial" panose="020B0604020202020204" pitchFamily="34" charset="0"/>
-                  <a:cs typeface="Arial" panose="020B0604020202020204" pitchFamily="34" charset="0"/>
-                </a:rPr>
-                <a:t> </a:t>
-              </a:r>
-              <a:r>
-                <a:rPr lang="de-DE" b="1" dirty="0" err="1">
-                  <a:solidFill>
-                    <a:schemeClr val="bg1"/>
-                  </a:solidFill>
-                  <a:latin typeface="Arial" panose="020B0604020202020204" pitchFamily="34" charset="0"/>
-                  <a:cs typeface="Arial" panose="020B0604020202020204" pitchFamily="34" charset="0"/>
-                </a:rPr>
-                <a:t>your</a:t>
-              </a:r>
-              <a:r>
-                <a:rPr lang="de-DE" b="1" dirty="0">
-                  <a:solidFill>
-                    <a:schemeClr val="bg1"/>
-                  </a:solidFill>
-                  <a:latin typeface="Arial" panose="020B0604020202020204" pitchFamily="34" charset="0"/>
-                  <a:cs typeface="Arial" panose="020B0604020202020204" pitchFamily="34" charset="0"/>
-                </a:rPr>
-                <a:t> </a:t>
-              </a:r>
-              <a:r>
-                <a:rPr lang="de-DE" b="1" dirty="0" err="1">
-                  <a:solidFill>
-                    <a:schemeClr val="bg1"/>
-                  </a:solidFill>
-                  <a:latin typeface="Arial" panose="020B0604020202020204" pitchFamily="34" charset="0"/>
-                  <a:cs typeface="Arial" panose="020B0604020202020204" pitchFamily="34" charset="0"/>
-                </a:rPr>
-                <a:t>dialogues</a:t>
-              </a:r>
-              <a:r>
-                <a:rPr lang="de-DE" b="1" dirty="0">
-                  <a:solidFill>
-                    <a:schemeClr val="bg1"/>
-                  </a:solidFill>
-                  <a:latin typeface="Arial" panose="020B0604020202020204" pitchFamily="34" charset="0"/>
-                  <a:cs typeface="Arial" panose="020B0604020202020204" pitchFamily="34" charset="0"/>
-                </a:rPr>
-                <a:t> </a:t>
-              </a:r>
-              <a:r>
-                <a:rPr lang="de-DE" b="1" dirty="0" err="1">
-                  <a:solidFill>
-                    <a:schemeClr val="bg1"/>
-                  </a:solidFill>
-                  <a:latin typeface="Arial" panose="020B0604020202020204" pitchFamily="34" charset="0"/>
-                  <a:cs typeface="Arial" panose="020B0604020202020204" pitchFamily="34" charset="0"/>
-                </a:rPr>
-                <a:t>based</a:t>
-              </a:r>
-              <a:r>
-                <a:rPr lang="de-DE" b="1" dirty="0">
-                  <a:solidFill>
-                    <a:schemeClr val="bg1"/>
-                  </a:solidFill>
-                  <a:latin typeface="Arial" panose="020B0604020202020204" pitchFamily="34" charset="0"/>
-                  <a:cs typeface="Arial" panose="020B0604020202020204" pitchFamily="34" charset="0"/>
-                </a:rPr>
-                <a:t> on </a:t>
-              </a:r>
-              <a:r>
-                <a:rPr lang="de-DE" b="1" dirty="0" err="1">
-                  <a:solidFill>
-                    <a:schemeClr val="bg1"/>
-                  </a:solidFill>
-                  <a:latin typeface="Arial" panose="020B0604020202020204" pitchFamily="34" charset="0"/>
-                  <a:cs typeface="Arial" panose="020B0604020202020204" pitchFamily="34" charset="0"/>
-                </a:rPr>
-                <a:t>the</a:t>
-              </a:r>
-              <a:r>
-                <a:rPr lang="de-DE" b="1" dirty="0">
-                  <a:solidFill>
-                    <a:schemeClr val="bg1"/>
-                  </a:solidFill>
-                  <a:latin typeface="Arial" panose="020B0604020202020204" pitchFamily="34" charset="0"/>
-                  <a:cs typeface="Arial" panose="020B0604020202020204" pitchFamily="34" charset="0"/>
-                </a:rPr>
-                <a:t> </a:t>
-              </a:r>
-              <a:r>
-                <a:rPr lang="de-DE" b="1" dirty="0" err="1">
-                  <a:solidFill>
-                    <a:schemeClr val="bg1"/>
-                  </a:solidFill>
-                  <a:latin typeface="Arial" panose="020B0604020202020204" pitchFamily="34" charset="0"/>
-                  <a:cs typeface="Arial" panose="020B0604020202020204" pitchFamily="34" charset="0"/>
-                </a:rPr>
-                <a:t>state</a:t>
-              </a:r>
-              <a:r>
-                <a:rPr lang="de-DE" b="1" dirty="0">
-                  <a:solidFill>
-                    <a:schemeClr val="bg1"/>
-                  </a:solidFill>
-                  <a:latin typeface="Arial" panose="020B0604020202020204" pitchFamily="34" charset="0"/>
-                  <a:cs typeface="Arial" panose="020B0604020202020204" pitchFamily="34" charset="0"/>
-                </a:rPr>
-                <a:t> </a:t>
-              </a:r>
-              <a:r>
-                <a:rPr lang="de-DE" b="1" dirty="0" err="1">
-                  <a:solidFill>
-                    <a:schemeClr val="bg1"/>
-                  </a:solidFill>
-                  <a:latin typeface="Arial" panose="020B0604020202020204" pitchFamily="34" charset="0"/>
-                  <a:cs typeface="Arial" panose="020B0604020202020204" pitchFamily="34" charset="0"/>
-                </a:rPr>
-                <a:t>of</a:t>
-              </a:r>
-              <a:r>
-                <a:rPr lang="de-DE" b="1" dirty="0">
-                  <a:solidFill>
-                    <a:schemeClr val="bg1"/>
-                  </a:solidFill>
-                  <a:latin typeface="Arial" panose="020B0604020202020204" pitchFamily="34" charset="0"/>
-                  <a:cs typeface="Arial" panose="020B0604020202020204" pitchFamily="34" charset="0"/>
-                </a:rPr>
-                <a:t> </a:t>
-              </a:r>
-              <a:r>
-                <a:rPr lang="de-DE" b="1" dirty="0" err="1">
-                  <a:solidFill>
-                    <a:schemeClr val="bg1"/>
-                  </a:solidFill>
-                  <a:latin typeface="Arial" panose="020B0604020202020204" pitchFamily="34" charset="0"/>
-                  <a:cs typeface="Arial" panose="020B0604020202020204" pitchFamily="34" charset="0"/>
-                </a:rPr>
-                <a:t>your</a:t>
-              </a:r>
-              <a:r>
-                <a:rPr lang="de-DE" b="1" dirty="0">
-                  <a:solidFill>
-                    <a:schemeClr val="bg1"/>
-                  </a:solidFill>
-                  <a:latin typeface="Arial" panose="020B0604020202020204" pitchFamily="34" charset="0"/>
-                  <a:cs typeface="Arial" panose="020B0604020202020204" pitchFamily="34" charset="0"/>
-                </a:rPr>
-                <a:t> game</a:t>
-              </a:r>
-            </a:p>
-          </p:txBody>
-        </p:sp>
-      </p:grpSp>
-      <p:pic>
-        <p:nvPicPr>
-          <p:cNvPr id="4" name="Grafik 3" descr="Ein Bild, das Text enthält.&#10;&#10;Automatisch generierte Beschreibung">
-            <a:extLst>
-              <a:ext uri="{FF2B5EF4-FFF2-40B4-BE49-F238E27FC236}">
-                <a16:creationId xmlns:a16="http://schemas.microsoft.com/office/drawing/2014/main" id="{4CB58C3C-C6D0-43D2-A892-DEDEEFEFA522}"/>
-              </a:ext>
-            </a:extLst>
-          </p:cNvPr>
-          <p:cNvPicPr>
-            <a:picLocks noChangeAspect="1"/>
-          </p:cNvPicPr>
-          <p:nvPr/>
-        </p:nvPicPr>
-        <p:blipFill>
-          <a:blip r:embed="rId2">
-            <a:extLst>
-              <a:ext uri="{28A0092B-C50C-407E-A947-70E740481C1C}">
-                <a14:useLocalDpi xmlns:a14="http://schemas.microsoft.com/office/drawing/2010/main" val="0"/>
-              </a:ext>
-            </a:extLst>
-          </a:blip>
-          <a:stretch>
-            <a:fillRect/>
-          </a:stretch>
-        </p:blipFill>
-        <p:spPr>
-          <a:xfrm>
-            <a:off x="5899968" y="3690898"/>
-            <a:ext cx="4394623" cy="1470382"/>
-          </a:xfrm>
-          <a:prstGeom prst="rect">
-            <a:avLst/>
-          </a:prstGeom>
-        </p:spPr>
-      </p:pic>
-      <p:pic>
-        <p:nvPicPr>
-          <p:cNvPr id="8" name="Grafik 7">
-            <a:extLst>
-              <a:ext uri="{FF2B5EF4-FFF2-40B4-BE49-F238E27FC236}">
-                <a16:creationId xmlns:a16="http://schemas.microsoft.com/office/drawing/2014/main" id="{824BA5AB-BA75-4BEC-97EA-5F790177CB79}"/>
-              </a:ext>
-            </a:extLst>
-          </p:cNvPr>
-          <p:cNvPicPr>
-            <a:picLocks noChangeAspect="1"/>
-          </p:cNvPicPr>
-          <p:nvPr/>
-        </p:nvPicPr>
-        <p:blipFill>
-          <a:blip r:embed="rId3">
-            <a:extLst>
-              <a:ext uri="{28A0092B-C50C-407E-A947-70E740481C1C}">
-                <a14:useLocalDpi xmlns:a14="http://schemas.microsoft.com/office/drawing/2010/main" val="0"/>
-              </a:ext>
-            </a:extLst>
-          </a:blip>
-          <a:stretch>
-            <a:fillRect/>
-          </a:stretch>
-        </p:blipFill>
-        <p:spPr>
-          <a:xfrm>
-            <a:off x="805700" y="766625"/>
-            <a:ext cx="4442845" cy="3894157"/>
-          </a:xfrm>
-          <a:prstGeom prst="rect">
-            <a:avLst/>
-          </a:prstGeom>
-        </p:spPr>
-      </p:pic>
-    </p:spTree>
-    <p:extLst>
-      <p:ext uri="{BB962C8B-B14F-4D97-AF65-F5344CB8AC3E}">
-        <p14:creationId xmlns:p14="http://schemas.microsoft.com/office/powerpoint/2010/main" val="1762157568"/>
-      </p:ext>
-    </p:extLst>
-  </p:cSld>
-  <p:clrMapOvr>
-    <a:masterClrMapping/>
-  </p:clrMapOvr>
-</p:sld>
-</file>
-
-<file path=ppt/slides/slide7.xml><?xml version="1.0" encoding="utf-8"?>
-<p:sld xmlns:a="http://schemas.openxmlformats.org/drawingml/2006/main" xmlns:r="http://schemas.openxmlformats.org/officeDocument/2006/relationships" xmlns:p="http://schemas.openxmlformats.org/presentationml/2006/main">
-  <p:cSld>
-    <p:bg>
-      <p:bgPr>
-        <a:solidFill>
-          <a:schemeClr val="bg1"/>
-        </a:solidFill>
-        <a:effectLst/>
-      </p:bgPr>
-    </p:bg>
-    <p:spTree>
-      <p:nvGrpSpPr>
-        <p:cNvPr id="1" name=""/>
-        <p:cNvGrpSpPr/>
-        <p:nvPr/>
-      </p:nvGrpSpPr>
-      <p:grpSpPr>
-        <a:xfrm>
-          <a:off x="0" y="0"/>
-          <a:ext cx="0" cy="0"/>
-          <a:chOff x="0" y="0"/>
-          <a:chExt cx="0" cy="0"/>
-        </a:xfrm>
-      </p:grpSpPr>
-      <p:sp useBgFill="1">
-        <p:nvSpPr>
-          <p:cNvPr id="11" name="Rectangle 10">
-            <a:extLst>
-              <a:ext uri="{FF2B5EF4-FFF2-40B4-BE49-F238E27FC236}">
-                <a16:creationId xmlns:a16="http://schemas.microsoft.com/office/drawing/2014/main" id="{AB8C311F-7253-4AED-9701-7FC0708C41C7}"/>
-              </a:ext>
-              <a:ext uri="{C183D7F6-B498-43B3-948B-1728B52AA6E4}">
-                <adec:decorative xmlns:adec="http://schemas.microsoft.com/office/drawing/2017/decorative" val="1"/>
-              </a:ext>
-            </a:extLst>
-          </p:cNvPr>
-          <p:cNvSpPr>
-            <a:spLocks noGrp="1" noRot="1" noChangeAspect="1" noMove="1" noResize="1" noEditPoints="1" noAdjustHandles="1" noChangeArrowheads="1" noChangeShapeType="1" noTextEdit="1"/>
-          </p:cNvSpPr>
-          <p:nvPr>
-            <p:extLst>
-              <p:ext uri="{386F3935-93C4-4BCD-93E2-E3B085C9AB24}">
-                <p16:designElem xmlns:p16="http://schemas.microsoft.com/office/powerpoint/2015/main" val="1"/>
-              </p:ext>
-            </p:extLst>
-          </p:nvPr>
-        </p:nvSpPr>
-        <p:spPr>
-          <a:xfrm>
-            <a:off x="0" y="0"/>
-            <a:ext cx="12192000" cy="6858000"/>
-          </a:xfrm>
-          <a:prstGeom prst="rect">
-            <a:avLst/>
-          </a:prstGeom>
-          <a:ln w="12700" cap="flat" cmpd="sng" algn="ctr">
-            <a:noFill/>
-            <a:prstDash val="solid"/>
-            <a:miter lim="800000"/>
-          </a:ln>
-          <a:effectLst/>
-          <a:extLst>
-            <a:ext uri="{91240B29-F687-4F45-9708-019B960494DF}">
-              <a14:hiddenLine xmlns:a14="http://schemas.microsoft.com/office/drawing/2010/main" w="12700" cap="flat" cmpd="sng" algn="ctr">
-                <a:solidFill>
-                  <a:schemeClr val="accent1">
-                    <a:shade val="50000"/>
-                  </a:schemeClr>
-                </a:solidFill>
-                <a:prstDash val="solid"/>
-                <a:miter lim="800000"/>
-              </a14:hiddenLine>
-            </a:ext>
-          </a:extLst>
-        </p:spPr>
-        <p:style>
-          <a:lnRef idx="2">
-            <a:schemeClr val="accent1">
-              <a:shade val="50000"/>
-            </a:schemeClr>
-          </a:lnRef>
-          <a:fillRef idx="1">
-            <a:schemeClr val="accent1"/>
-          </a:fillRef>
-          <a:effectRef idx="0">
-            <a:schemeClr val="accent1"/>
-          </a:effectRef>
-          <a:fontRef idx="minor">
-            <a:schemeClr val="lt1"/>
-          </a:fontRef>
-        </p:style>
-        <p:txBody>
-          <a:bodyPr rtlCol="0" anchor="ctr"/>
-          <a:lstStyle/>
-          <a:p>
-            <a:pPr algn="ctr"/>
-            <a:endParaRPr lang="en-US"/>
-          </a:p>
-        </p:txBody>
-      </p:sp>
-      <p:sp>
-        <p:nvSpPr>
-          <p:cNvPr id="13" name="Rectangle 12">
-            <a:extLst>
-              <a:ext uri="{FF2B5EF4-FFF2-40B4-BE49-F238E27FC236}">
-                <a16:creationId xmlns:a16="http://schemas.microsoft.com/office/drawing/2014/main" id="{E2384209-CB15-4CDF-9D31-C44FD9A3F20D}"/>
-              </a:ext>
-              <a:ext uri="{C183D7F6-B498-43B3-948B-1728B52AA6E4}">
-                <adec:decorative xmlns:adec="http://schemas.microsoft.com/office/drawing/2017/decorative" val="1"/>
-              </a:ext>
-            </a:extLst>
-          </p:cNvPr>
-          <p:cNvSpPr>
-            <a:spLocks noGrp="1" noRot="1" noChangeAspect="1" noMove="1" noResize="1" noEditPoints="1" noAdjustHandles="1" noChangeArrowheads="1" noChangeShapeType="1" noTextEdit="1"/>
-          </p:cNvSpPr>
-          <p:nvPr>
-            <p:extLst>
-              <p:ext uri="{386F3935-93C4-4BCD-93E2-E3B085C9AB24}">
-                <p16:designElem xmlns:p16="http://schemas.microsoft.com/office/powerpoint/2015/main" val="1"/>
-              </p:ext>
-            </p:extLst>
-          </p:nvPr>
-        </p:nvSpPr>
-        <p:spPr>
-          <a:xfrm rot="16200000" flipH="1">
-            <a:off x="2666617" y="-2666188"/>
-            <a:ext cx="6858000" cy="12191233"/>
-          </a:xfrm>
-          <a:prstGeom prst="rect">
-            <a:avLst/>
-          </a:prstGeom>
-          <a:gradFill>
-            <a:gsLst>
-              <a:gs pos="8000">
-                <a:schemeClr val="accent1"/>
-              </a:gs>
-              <a:gs pos="100000">
-                <a:schemeClr val="accent1">
-                  <a:lumMod val="50000"/>
-                </a:schemeClr>
-              </a:gs>
-            </a:gsLst>
-            <a:lin ang="12000000" scaled="0"/>
-          </a:gradFill>
-          <a:ln>
-            <a:noFill/>
-          </a:ln>
-        </p:spPr>
-        <p:style>
-          <a:lnRef idx="2">
-            <a:schemeClr val="accent1">
-              <a:shade val="50000"/>
-            </a:schemeClr>
-          </a:lnRef>
-          <a:fillRef idx="1">
-            <a:schemeClr val="accent1"/>
-          </a:fillRef>
-          <a:effectRef idx="0">
-            <a:schemeClr val="accent1"/>
-          </a:effectRef>
-          <a:fontRef idx="minor">
-            <a:schemeClr val="lt1"/>
-          </a:fontRef>
-        </p:style>
-        <p:txBody>
-          <a:bodyPr rtlCol="0" anchor="ctr"/>
-          <a:lstStyle/>
-          <a:p>
-            <a:pPr algn="ctr"/>
-            <a:endParaRPr lang="en-US"/>
-          </a:p>
-        </p:txBody>
-      </p:sp>
-      <p:sp>
-        <p:nvSpPr>
-          <p:cNvPr id="15" name="Rectangle 14">
-            <a:extLst>
-              <a:ext uri="{FF2B5EF4-FFF2-40B4-BE49-F238E27FC236}">
-                <a16:creationId xmlns:a16="http://schemas.microsoft.com/office/drawing/2014/main" id="{2633B3B5-CC90-43F0-8714-D31D1F3F0209}"/>
-              </a:ext>
-              <a:ext uri="{C183D7F6-B498-43B3-948B-1728B52AA6E4}">
-                <adec:decorative xmlns:adec="http://schemas.microsoft.com/office/drawing/2017/decorative" val="1"/>
-              </a:ext>
-            </a:extLst>
-          </p:cNvPr>
-          <p:cNvSpPr>
-            <a:spLocks noGrp="1" noRot="1" noChangeAspect="1" noMove="1" noResize="1" noEditPoints="1" noAdjustHandles="1" noChangeArrowheads="1" noChangeShapeType="1" noTextEdit="1"/>
-          </p:cNvSpPr>
-          <p:nvPr>
-            <p:extLst>
-              <p:ext uri="{386F3935-93C4-4BCD-93E2-E3B085C9AB24}">
-                <p16:designElem xmlns:p16="http://schemas.microsoft.com/office/powerpoint/2015/main" val="1"/>
-              </p:ext>
-            </p:extLst>
-          </p:nvPr>
-        </p:nvSpPr>
-        <p:spPr>
-          <a:xfrm rot="10800000" flipH="1">
-            <a:off x="-2311" y="0"/>
-            <a:ext cx="9070846" cy="6857572"/>
-          </a:xfrm>
-          <a:prstGeom prst="rect">
-            <a:avLst/>
-          </a:prstGeom>
-          <a:gradFill>
-            <a:gsLst>
-              <a:gs pos="8000">
-                <a:srgbClr val="000000">
-                  <a:alpha val="52000"/>
-                </a:srgbClr>
-              </a:gs>
-              <a:gs pos="100000">
-                <a:schemeClr val="accent1"/>
-              </a:gs>
-            </a:gsLst>
-            <a:lin ang="4800000" scaled="0"/>
-          </a:gradFill>
-          <a:ln>
-            <a:noFill/>
-          </a:ln>
-        </p:spPr>
-        <p:style>
-          <a:lnRef idx="2">
-            <a:schemeClr val="accent1">
-              <a:shade val="50000"/>
-            </a:schemeClr>
-          </a:lnRef>
-          <a:fillRef idx="1">
-            <a:schemeClr val="accent1"/>
-          </a:fillRef>
-          <a:effectRef idx="0">
-            <a:schemeClr val="accent1"/>
-          </a:effectRef>
-          <a:fontRef idx="minor">
-            <a:schemeClr val="lt1"/>
-          </a:fontRef>
-        </p:style>
-        <p:txBody>
-          <a:bodyPr rtlCol="0" anchor="ctr"/>
-          <a:lstStyle/>
-          <a:p>
-            <a:pPr algn="ctr"/>
-            <a:endParaRPr lang="en-US"/>
-          </a:p>
-        </p:txBody>
-      </p:sp>
-      <p:sp>
-        <p:nvSpPr>
-          <p:cNvPr id="17" name="Rectangle 16">
-            <a:extLst>
-              <a:ext uri="{FF2B5EF4-FFF2-40B4-BE49-F238E27FC236}">
-                <a16:creationId xmlns:a16="http://schemas.microsoft.com/office/drawing/2014/main" id="{A8D57A06-A426-446D-B02C-A2DC6B62E45E}"/>
-              </a:ext>
-              <a:ext uri="{C183D7F6-B498-43B3-948B-1728B52AA6E4}">
-                <adec:decorative xmlns:adec="http://schemas.microsoft.com/office/drawing/2017/decorative" val="1"/>
-              </a:ext>
-            </a:extLst>
-          </p:cNvPr>
-          <p:cNvSpPr>
-            <a:spLocks noGrp="1" noRot="1" noChangeAspect="1" noMove="1" noResize="1" noEditPoints="1" noAdjustHandles="1" noChangeArrowheads="1" noChangeShapeType="1" noTextEdit="1"/>
-          </p:cNvSpPr>
-          <p:nvPr>
-            <p:extLst>
-              <p:ext uri="{386F3935-93C4-4BCD-93E2-E3B085C9AB24}">
-                <p16:designElem xmlns:p16="http://schemas.microsoft.com/office/powerpoint/2015/main" val="1"/>
-              </p:ext>
-            </p:extLst>
-          </p:nvPr>
-        </p:nvSpPr>
-        <p:spPr>
-          <a:xfrm rot="16200000" flipH="1">
-            <a:off x="3649491" y="-1685840"/>
-            <a:ext cx="4894564" cy="12193546"/>
-          </a:xfrm>
-          <a:prstGeom prst="rect">
-            <a:avLst/>
-          </a:prstGeom>
-          <a:gradFill>
-            <a:gsLst>
-              <a:gs pos="0">
-                <a:schemeClr val="accent5">
-                  <a:lumMod val="60000"/>
-                  <a:lumOff val="40000"/>
-                  <a:alpha val="0"/>
-                </a:schemeClr>
-              </a:gs>
-              <a:gs pos="100000">
-                <a:srgbClr val="000000">
-                  <a:alpha val="46000"/>
-                </a:srgbClr>
-              </a:gs>
-            </a:gsLst>
-            <a:lin ang="1200000" scaled="0"/>
-          </a:gradFill>
-          <a:ln>
-            <a:noFill/>
-          </a:ln>
-        </p:spPr>
-        <p:style>
-          <a:lnRef idx="2">
-            <a:schemeClr val="accent1">
-              <a:shade val="50000"/>
-            </a:schemeClr>
-          </a:lnRef>
-          <a:fillRef idx="1">
-            <a:schemeClr val="accent1"/>
-          </a:fillRef>
-          <a:effectRef idx="0">
-            <a:schemeClr val="accent1"/>
-          </a:effectRef>
-          <a:fontRef idx="minor">
-            <a:schemeClr val="lt1"/>
-          </a:fontRef>
-        </p:style>
-        <p:txBody>
-          <a:bodyPr rtlCol="0" anchor="ctr"/>
-          <a:lstStyle/>
-          <a:p>
-            <a:pPr algn="ctr"/>
-            <a:endParaRPr lang="en-US"/>
-          </a:p>
-        </p:txBody>
-      </p:sp>
-      <p:sp>
-        <p:nvSpPr>
-          <p:cNvPr id="14" name="Rechteck 13">
-            <a:extLst>
-              <a:ext uri="{FF2B5EF4-FFF2-40B4-BE49-F238E27FC236}">
-                <a16:creationId xmlns:a16="http://schemas.microsoft.com/office/drawing/2014/main" id="{476BDBD2-5732-4836-B12C-D7D665FC25AC}"/>
-              </a:ext>
-            </a:extLst>
-          </p:cNvPr>
-          <p:cNvSpPr/>
-          <p:nvPr/>
-        </p:nvSpPr>
-        <p:spPr>
-          <a:xfrm>
-            <a:off x="426720" y="499853"/>
-            <a:ext cx="11328400" cy="5858294"/>
-          </a:xfrm>
-          <a:prstGeom prst="rect">
-            <a:avLst/>
-          </a:prstGeom>
-          <a:solidFill>
-            <a:schemeClr val="tx1">
-              <a:lumMod val="85000"/>
-              <a:lumOff val="15000"/>
-            </a:schemeClr>
-          </a:solidFill>
-          <a:ln>
-            <a:noFill/>
-          </a:ln>
-        </p:spPr>
-        <p:style>
-          <a:lnRef idx="2">
-            <a:schemeClr val="accent1">
-              <a:shade val="50000"/>
-            </a:schemeClr>
-          </a:lnRef>
-          <a:fillRef idx="1">
-            <a:schemeClr val="accent1"/>
-          </a:fillRef>
-          <a:effectRef idx="0">
-            <a:schemeClr val="accent1"/>
-          </a:effectRef>
-          <a:fontRef idx="minor">
-            <a:schemeClr val="lt1"/>
-          </a:fontRef>
-        </p:style>
-        <p:txBody>
-          <a:bodyPr rtlCol="0" anchor="ctr"/>
-          <a:lstStyle/>
-          <a:p>
-            <a:pPr algn="ctr"/>
-            <a:endParaRPr lang="de-DE"/>
-          </a:p>
-        </p:txBody>
-      </p:sp>
-      <p:grpSp>
-        <p:nvGrpSpPr>
-          <p:cNvPr id="7" name="Gruppieren 6">
-            <a:extLst>
-              <a:ext uri="{FF2B5EF4-FFF2-40B4-BE49-F238E27FC236}">
-                <a16:creationId xmlns:a16="http://schemas.microsoft.com/office/drawing/2014/main" id="{5DEB3A40-6BDF-48C2-B270-590F3402DB75}"/>
-              </a:ext>
-            </a:extLst>
-          </p:cNvPr>
-          <p:cNvGrpSpPr/>
-          <p:nvPr/>
-        </p:nvGrpSpPr>
-        <p:grpSpPr>
-          <a:xfrm>
-            <a:off x="7431417" y="5359081"/>
-            <a:ext cx="4766735" cy="999066"/>
-            <a:chOff x="7425265" y="964584"/>
-            <a:chExt cx="4766735" cy="999066"/>
-          </a:xfrm>
-        </p:grpSpPr>
-        <p:sp>
-          <p:nvSpPr>
-            <p:cNvPr id="9" name="Rechteck: eine Ecke abgeschnitten 8">
-              <a:extLst>
-                <a:ext uri="{FF2B5EF4-FFF2-40B4-BE49-F238E27FC236}">
-                  <a16:creationId xmlns:a16="http://schemas.microsoft.com/office/drawing/2014/main" id="{22AB770B-D05A-46AB-8561-5ACAFE0FAB9D}"/>
-                </a:ext>
-              </a:extLst>
-            </p:cNvPr>
-            <p:cNvSpPr/>
-            <p:nvPr/>
-          </p:nvSpPr>
-          <p:spPr>
-            <a:xfrm flipH="1">
-              <a:off x="7425265" y="964584"/>
-              <a:ext cx="4766735" cy="999066"/>
-            </a:xfrm>
-            <a:prstGeom prst="snip1Rect">
-              <a:avLst>
-                <a:gd name="adj" fmla="val 50000"/>
-              </a:avLst>
-            </a:prstGeom>
-            <a:gradFill flip="none" rotWithShape="1">
-              <a:gsLst>
-                <a:gs pos="0">
-                  <a:srgbClr val="335797">
-                    <a:shade val="30000"/>
-                    <a:satMod val="115000"/>
-                  </a:srgbClr>
-                </a:gs>
-                <a:gs pos="50000">
-                  <a:srgbClr val="335797">
-                    <a:shade val="67500"/>
-                    <a:satMod val="115000"/>
-                  </a:srgbClr>
-                </a:gs>
-                <a:gs pos="100000">
-                  <a:srgbClr val="335797">
-                    <a:shade val="100000"/>
-                    <a:satMod val="115000"/>
-                  </a:srgbClr>
-                </a:gs>
-              </a:gsLst>
-              <a:path path="circle">
-                <a:fillToRect l="100000" t="100000"/>
-              </a:path>
-              <a:tileRect r="-100000" b="-100000"/>
-            </a:gradFill>
-            <a:ln w="19050">
-              <a:solidFill>
-                <a:schemeClr val="bg1"/>
-              </a:solidFill>
-            </a:ln>
-          </p:spPr>
-          <p:style>
-            <a:lnRef idx="2">
-              <a:schemeClr val="accent1">
-                <a:shade val="50000"/>
-              </a:schemeClr>
-            </a:lnRef>
-            <a:fillRef idx="1">
-              <a:schemeClr val="accent1"/>
-            </a:fillRef>
-            <a:effectRef idx="0">
-              <a:schemeClr val="accent1"/>
-            </a:effectRef>
-            <a:fontRef idx="minor">
-              <a:schemeClr val="lt1"/>
-            </a:fontRef>
-          </p:style>
-          <p:txBody>
-            <a:bodyPr rtlCol="0" anchor="ctr"/>
-            <a:lstStyle/>
-            <a:p>
-              <a:pPr algn="ctr"/>
-              <a:endParaRPr lang="de-DE" dirty="0"/>
-            </a:p>
-          </p:txBody>
-        </p:sp>
-        <p:sp>
-          <p:nvSpPr>
-            <p:cNvPr id="12" name="Textfeld 11">
-              <a:extLst>
-                <a:ext uri="{FF2B5EF4-FFF2-40B4-BE49-F238E27FC236}">
-                  <a16:creationId xmlns:a16="http://schemas.microsoft.com/office/drawing/2014/main" id="{2EC181D6-53AB-491F-8D53-469A91CA71E7}"/>
-                </a:ext>
-              </a:extLst>
-            </p:cNvPr>
-            <p:cNvSpPr txBox="1"/>
-            <p:nvPr/>
-          </p:nvSpPr>
-          <p:spPr>
-            <a:xfrm>
-              <a:off x="8100960" y="1139562"/>
-              <a:ext cx="3903131" cy="646331"/>
-            </a:xfrm>
-            <a:prstGeom prst="rect">
-              <a:avLst/>
-            </a:prstGeom>
-            <a:noFill/>
-          </p:spPr>
-          <p:txBody>
-            <a:bodyPr wrap="square" rtlCol="0">
-              <a:spAutoFit/>
-            </a:bodyPr>
-            <a:lstStyle/>
-            <a:p>
-              <a:r>
-                <a:rPr lang="de-DE" b="1" dirty="0" err="1">
-                  <a:solidFill>
-                    <a:schemeClr val="bg1"/>
-                  </a:solidFill>
-                  <a:latin typeface="Arial" panose="020B0604020202020204" pitchFamily="34" charset="0"/>
-                  <a:cs typeface="Arial" panose="020B0604020202020204" pitchFamily="34" charset="0"/>
-                </a:rPr>
-                <a:t>With</a:t>
-              </a:r>
-              <a:r>
-                <a:rPr lang="de-DE" b="1" dirty="0">
-                  <a:solidFill>
-                    <a:schemeClr val="bg1"/>
-                  </a:solidFill>
-                  <a:latin typeface="Arial" panose="020B0604020202020204" pitchFamily="34" charset="0"/>
-                  <a:cs typeface="Arial" panose="020B0604020202020204" pitchFamily="34" charset="0"/>
-                </a:rPr>
-                <a:t> a </a:t>
+                <a:t> support and a </a:t>
               </a:r>
               <a:r>
                 <a:rPr lang="de-DE" b="1" dirty="0" err="1">
@@ -8803,7 +9646,7 @@
 </p:sld>
 </file>
 
-<file path=ppt/slides/slide8.xml><?xml version="1.0" encoding="utf-8"?>
+<file path=ppt/slides/slide9.xml><?xml version="1.0" encoding="utf-8"?>
 <p:sld xmlns:a="http://schemas.openxmlformats.org/drawingml/2006/main" xmlns:r="http://schemas.openxmlformats.org/officeDocument/2006/relationships" xmlns:p="http://schemas.openxmlformats.org/presentationml/2006/main">
   <p:cSld>
     <p:bg>
